--- a/presentation.pptx
+++ b/presentation.pptx
@@ -5,7 +5,7 @@
     <p:sldMasterId id="2147483648" r:id="rId1"/>
   </p:sldMasterIdLst>
   <p:notesMasterIdLst>
-    <p:notesMasterId r:id="rId24"/>
+    <p:notesMasterId r:id="rId27"/>
   </p:notesMasterIdLst>
   <p:sldIdLst>
     <p:sldId id="256" r:id="rId2"/>
@@ -30,6 +30,9 @@
     <p:sldId id="275" r:id="rId21"/>
     <p:sldId id="276" r:id="rId22"/>
     <p:sldId id="277" r:id="rId23"/>
+    <p:sldId id="278" r:id="rId24"/>
+    <p:sldId id="279" r:id="rId25"/>
+    <p:sldId id="280" r:id="rId26"/>
   </p:sldIdLst>
   <p:sldSz cx="12192000" cy="6858000"/>
   <p:notesSz cx="6858000" cy="12192000"/>
@@ -136,7 +139,7 @@
 <file path=ppt/revisionInfo.xml><?xml version="1.0" encoding="utf-8"?>
 <p1510:revInfo xmlns:a="http://schemas.openxmlformats.org/drawingml/2006/main" xmlns:r="http://schemas.openxmlformats.org/officeDocument/2006/relationships" xmlns:p1510="http://schemas.microsoft.com/office/powerpoint/2015/10/main">
   <p1510:revLst>
-    <p1510:client id="{9D4E8D16-CB59-414D-86FD-83CDA54E0077}" v="1" dt="2026-09-02T15:40:57.905"/>
+    <p1510:client id="{0480EFB2-A787-4DB4-BADF-BE07FA50DFAD}" v="2" dt="2026-09-08T13:04:02.163"/>
   </p1510:revLst>
 </p1510:revInfo>
 </file>
@@ -146,22 +149,30 @@
   <pc:docChgLst>
     <pc:chgData name="Luca Cussigh" userId="368af960-6488-4d64-b4ce-638e2566cd2b" providerId="ADAL" clId="{F11DC404-7128-42C3-A4C0-983A4FB681AD}"/>
     <pc:docChg chg="modSld">
-      <pc:chgData name="Luca Cussigh" userId="368af960-6488-4d64-b4ce-638e2566cd2b" providerId="ADAL" clId="{F11DC404-7128-42C3-A4C0-983A4FB681AD}" dt="2026-09-02T15:40:58.918" v="2"/>
+      <pc:chgData name="Luca Cussigh" userId="368af960-6488-4d64-b4ce-638e2566cd2b" providerId="ADAL" clId="{F11DC404-7128-42C3-A4C0-983A4FB681AD}" dt="2026-09-08T13:04:03.207" v="5"/>
       <pc:docMkLst>
         <pc:docMk/>
       </pc:docMkLst>
       <pc:sldChg chg="addSp delSp modSp mod">
-        <pc:chgData name="Luca Cussigh" userId="368af960-6488-4d64-b4ce-638e2566cd2b" providerId="ADAL" clId="{F11DC404-7128-42C3-A4C0-983A4FB681AD}" dt="2026-09-02T15:40:58.918" v="2"/>
+        <pc:chgData name="Luca Cussigh" userId="368af960-6488-4d64-b4ce-638e2566cd2b" providerId="ADAL" clId="{F11DC404-7128-42C3-A4C0-983A4FB681AD}" dt="2026-09-08T13:04:03.207" v="5"/>
         <pc:sldMkLst>
           <pc:docMk/>
-          <pc:sldMk cId="0" sldId="266"/>
+          <pc:sldMk cId="0" sldId="257"/>
         </pc:sldMkLst>
         <pc:spChg chg="add del mod">
-          <ac:chgData name="Luca Cussigh" userId="368af960-6488-4d64-b4ce-638e2566cd2b" providerId="ADAL" clId="{F11DC404-7128-42C3-A4C0-983A4FB681AD}" dt="2026-09-02T15:40:58.918" v="2"/>
+          <ac:chgData name="Luca Cussigh" userId="368af960-6488-4d64-b4ce-638e2566cd2b" providerId="ADAL" clId="{F11DC404-7128-42C3-A4C0-983A4FB681AD}" dt="2026-09-08T13:04:01.314" v="2"/>
           <ac:spMkLst>
             <pc:docMk/>
-            <pc:sldMk cId="0" sldId="266"/>
-            <ac:spMk id="2" creationId="{E25E5DA8-FAC9-623C-ECD4-0051DFD55C55}"/>
+            <pc:sldMk cId="0" sldId="257"/>
+            <ac:spMk id="2" creationId="{30002FBA-F6C0-3898-338E-CBDEF4C301C8}"/>
+          </ac:spMkLst>
+        </pc:spChg>
+        <pc:spChg chg="add del mod">
+          <ac:chgData name="Luca Cussigh" userId="368af960-6488-4d64-b4ce-638e2566cd2b" providerId="ADAL" clId="{F11DC404-7128-42C3-A4C0-983A4FB681AD}" dt="2026-09-08T13:04:03.207" v="5"/>
+          <ac:spMkLst>
+            <pc:docMk/>
+            <pc:sldMk cId="0" sldId="257"/>
+            <ac:spMk id="3" creationId="{4BE5B766-CCCC-C8E8-D3B0-3D1D9C5AE418}"/>
           </ac:spMkLst>
         </pc:spChg>
       </pc:sldChg>
@@ -195,7 +206,7 @@
     </p:spTree>
     <p:extLst>
       <p:ext uri="{BB962C8B-B14F-4D97-AF65-F5344CB8AC3E}">
-        <p14:creationId xmlns:p14="http://schemas.microsoft.com/office/powerpoint/2010/main" val="2225788001"/>
+        <p14:creationId xmlns:p14="http://schemas.microsoft.com/office/powerpoint/2010/main" val="120905468"/>
       </p:ext>
     </p:extLst>
   </p:cSld>
@@ -423,6 +434,90 @@
           <a:bodyPr/>
           <a:lstStyle/>
           <a:p>
+            <a:endParaRPr lang="en-US" dirty="0"/>
+          </a:p>
+        </p:txBody>
+      </p:sp>
+      <p:sp>
+        <p:nvSpPr>
+          <p:cNvPr id="4" name="Slide Number Placeholder 3"/>
+          <p:cNvSpPr>
+            <a:spLocks noGrp="1"/>
+          </p:cNvSpPr>
+          <p:nvPr>
+            <p:ph type="sldNum" sz="quarter" idx="10"/>
+          </p:nvPr>
+        </p:nvSpPr>
+        <p:spPr/>
+        <p:txBody>
+          <a:bodyPr/>
+          <a:lstStyle/>
+          <a:p>
+            <a:fld id="{F7021451-1387-4CA6-816F-3879F97B5CBC}" type="slidenum">
+              <a:rPr lang="en-US"/>
+              <a:t>10</a:t>
+            </a:fld>
+            <a:endParaRPr lang="en-US"/>
+          </a:p>
+        </p:txBody>
+      </p:sp>
+    </p:spTree>
+    <p:extLst>
+      <p:ext uri="{BB962C8B-B14F-4D97-AF65-F5344CB8AC3E}">
+        <p14:creationId xmlns:p14="http://schemas.microsoft.com/office/powerpoint/2010/main" val="1024086991"/>
+      </p:ext>
+    </p:extLst>
+  </p:cSld>
+  <p:clrMapOvr>
+    <a:masterClrMapping/>
+  </p:clrMapOvr>
+</p:notes>
+</file>
+
+<file path=ppt/notesSlides/notesSlide11.xml><?xml version="1.0" encoding="utf-8"?>
+<p:notes xmlns:a="http://schemas.openxmlformats.org/drawingml/2006/main" xmlns:r="http://schemas.openxmlformats.org/officeDocument/2006/relationships" xmlns:p="http://schemas.openxmlformats.org/presentationml/2006/main">
+  <p:cSld>
+    <p:spTree>
+      <p:nvGrpSpPr>
+        <p:cNvPr id="1" name=""/>
+        <p:cNvGrpSpPr/>
+        <p:nvPr/>
+      </p:nvGrpSpPr>
+      <p:grpSpPr>
+        <a:xfrm>
+          <a:off x="0" y="0"/>
+          <a:ext cx="0" cy="0"/>
+          <a:chOff x="0" y="0"/>
+          <a:chExt cx="0" cy="0"/>
+        </a:xfrm>
+      </p:grpSpPr>
+      <p:sp>
+        <p:nvSpPr>
+          <p:cNvPr id="2" name="Slide Image Placeholder 1"/>
+          <p:cNvSpPr>
+            <a:spLocks noGrp="1" noRot="1" noChangeAspect="1"/>
+          </p:cNvSpPr>
+          <p:nvPr>
+            <p:ph type="sldImg"/>
+          </p:nvPr>
+        </p:nvSpPr>
+        <p:spPr/>
+      </p:sp>
+      <p:sp>
+        <p:nvSpPr>
+          <p:cNvPr id="3" name="Notes Placeholder 2"/>
+          <p:cNvSpPr>
+            <a:spLocks noGrp="1"/>
+          </p:cNvSpPr>
+          <p:nvPr>
+            <p:ph type="body" idx="1"/>
+          </p:nvPr>
+        </p:nvSpPr>
+        <p:spPr/>
+        <p:txBody>
+          <a:bodyPr/>
+          <a:lstStyle/>
+          <a:p>
             <a:r>
               <a:rPr lang="en-US" dirty="0"/>
               <a:t>---
@@ -453,7 +548,7 @@
           <a:p>
             <a:fld id="{F7021451-1387-4CA6-816F-3879F97B5CBC}" type="slidenum">
               <a:rPr lang="en-US"/>
-              <a:t>10</a:t>
+              <a:t>11</a:t>
             </a:fld>
             <a:endParaRPr lang="en-US"/>
           </a:p>
@@ -472,7 +567,7 @@
 </p:notes>
 </file>
 
-<file path=ppt/notesSlides/notesSlide11.xml><?xml version="1.0" encoding="utf-8"?>
+<file path=ppt/notesSlides/notesSlide12.xml><?xml version="1.0" encoding="utf-8"?>
 <p:notes xmlns:a="http://schemas.openxmlformats.org/drawingml/2006/main" xmlns:r="http://schemas.openxmlformats.org/officeDocument/2006/relationships" xmlns:p="http://schemas.openxmlformats.org/presentationml/2006/main">
   <p:cSld>
     <p:spTree>
@@ -537,7 +632,7 @@
           <a:p>
             <a:fld id="{F7021451-1387-4CA6-816F-3879F97B5CBC}" type="slidenum">
               <a:rPr lang="en-US"/>
-              <a:t>11</a:t>
+              <a:t>12</a:t>
             </a:fld>
             <a:endParaRPr lang="en-US"/>
           </a:p>
@@ -556,7 +651,7 @@
 </p:notes>
 </file>
 
-<file path=ppt/notesSlides/notesSlide12.xml><?xml version="1.0" encoding="utf-8"?>
+<file path=ppt/notesSlides/notesSlide13.xml><?xml version="1.0" encoding="utf-8"?>
 <p:notes xmlns:a="http://schemas.openxmlformats.org/drawingml/2006/main" xmlns:r="http://schemas.openxmlformats.org/officeDocument/2006/relationships" xmlns:p="http://schemas.openxmlformats.org/presentationml/2006/main">
   <p:cSld>
     <p:spTree>
@@ -635,7 +730,7 @@
           <a:p>
             <a:fld id="{F7021451-1387-4CA6-816F-3879F97B5CBC}" type="slidenum">
               <a:rPr lang="en-US"/>
-              <a:t>12</a:t>
+              <a:t>13</a:t>
             </a:fld>
             <a:endParaRPr lang="en-US"/>
           </a:p>
@@ -654,7 +749,7 @@
 </p:notes>
 </file>
 
-<file path=ppt/notesSlides/notesSlide13.xml><?xml version="1.0" encoding="utf-8"?>
+<file path=ppt/notesSlides/notesSlide14.xml><?xml version="1.0" encoding="utf-8"?>
 <p:notes xmlns:a="http://schemas.openxmlformats.org/drawingml/2006/main" xmlns:r="http://schemas.openxmlformats.org/officeDocument/2006/relationships" xmlns:p="http://schemas.openxmlformats.org/presentationml/2006/main">
   <p:cSld>
     <p:spTree>
@@ -719,7 +814,7 @@
           <a:p>
             <a:fld id="{F7021451-1387-4CA6-816F-3879F97B5CBC}" type="slidenum">
               <a:rPr lang="en-US"/>
-              <a:t>13</a:t>
+              <a:t>14</a:t>
             </a:fld>
             <a:endParaRPr lang="en-US"/>
           </a:p>
@@ -738,7 +833,7 @@
 </p:notes>
 </file>
 
-<file path=ppt/notesSlides/notesSlide14.xml><?xml version="1.0" encoding="utf-8"?>
+<file path=ppt/notesSlides/notesSlide15.xml><?xml version="1.0" encoding="utf-8"?>
 <p:notes xmlns:a="http://schemas.openxmlformats.org/drawingml/2006/main" xmlns:r="http://schemas.openxmlformats.org/officeDocument/2006/relationships" xmlns:p="http://schemas.openxmlformats.org/presentationml/2006/main">
   <p:cSld>
     <p:spTree>
@@ -844,7 +939,7 @@
           <a:p>
             <a:fld id="{F7021451-1387-4CA6-816F-3879F97B5CBC}" type="slidenum">
               <a:rPr lang="en-US"/>
-              <a:t>14</a:t>
+              <a:t>15</a:t>
             </a:fld>
             <a:endParaRPr lang="en-US"/>
           </a:p>
@@ -863,7 +958,7 @@
 </p:notes>
 </file>
 
-<file path=ppt/notesSlides/notesSlide15.xml><?xml version="1.0" encoding="utf-8"?>
+<file path=ppt/notesSlides/notesSlide16.xml><?xml version="1.0" encoding="utf-8"?>
 <p:notes xmlns:a="http://schemas.openxmlformats.org/drawingml/2006/main" xmlns:r="http://schemas.openxmlformats.org/officeDocument/2006/relationships" xmlns:p="http://schemas.openxmlformats.org/presentationml/2006/main">
   <p:cSld>
     <p:spTree>
@@ -928,7 +1023,7 @@
           <a:p>
             <a:fld id="{F7021451-1387-4CA6-816F-3879F97B5CBC}" type="slidenum">
               <a:rPr lang="en-US"/>
-              <a:t>15</a:t>
+              <a:t>16</a:t>
             </a:fld>
             <a:endParaRPr lang="en-US"/>
           </a:p>
@@ -947,7 +1042,7 @@
 </p:notes>
 </file>
 
-<file path=ppt/notesSlides/notesSlide16.xml><?xml version="1.0" encoding="utf-8"?>
+<file path=ppt/notesSlides/notesSlide17.xml><?xml version="1.0" encoding="utf-8"?>
 <p:notes xmlns:a="http://schemas.openxmlformats.org/drawingml/2006/main" xmlns:r="http://schemas.openxmlformats.org/officeDocument/2006/relationships" xmlns:p="http://schemas.openxmlformats.org/presentationml/2006/main">
   <p:cSld>
     <p:spTree>
@@ -1012,7 +1107,7 @@
           <a:p>
             <a:fld id="{F7021451-1387-4CA6-816F-3879F97B5CBC}" type="slidenum">
               <a:rPr lang="en-US"/>
-              <a:t>16</a:t>
+              <a:t>17</a:t>
             </a:fld>
             <a:endParaRPr lang="en-US"/>
           </a:p>
@@ -1031,7 +1126,7 @@
 </p:notes>
 </file>
 
-<file path=ppt/notesSlides/notesSlide17.xml><?xml version="1.0" encoding="utf-8"?>
+<file path=ppt/notesSlides/notesSlide18.xml><?xml version="1.0" encoding="utf-8"?>
 <p:notes xmlns:a="http://schemas.openxmlformats.org/drawingml/2006/main" xmlns:r="http://schemas.openxmlformats.org/officeDocument/2006/relationships" xmlns:p="http://schemas.openxmlformats.org/presentationml/2006/main">
   <p:cSld>
     <p:spTree>
@@ -1096,7 +1191,7 @@
           <a:p>
             <a:fld id="{F7021451-1387-4CA6-816F-3879F97B5CBC}" type="slidenum">
               <a:rPr lang="en-US"/>
-              <a:t>17</a:t>
+              <a:t>18</a:t>
             </a:fld>
             <a:endParaRPr lang="en-US"/>
           </a:p>
@@ -1115,7 +1210,7 @@
 </p:notes>
 </file>
 
-<file path=ppt/notesSlides/notesSlide18.xml><?xml version="1.0" encoding="utf-8"?>
+<file path=ppt/notesSlides/notesSlide19.xml><?xml version="1.0" encoding="utf-8"?>
 <p:notes xmlns:a="http://schemas.openxmlformats.org/drawingml/2006/main" xmlns:r="http://schemas.openxmlformats.org/officeDocument/2006/relationships" xmlns:p="http://schemas.openxmlformats.org/presentationml/2006/main">
   <p:cSld>
     <p:spTree>
@@ -1180,7 +1275,7 @@
           <a:p>
             <a:fld id="{F7021451-1387-4CA6-816F-3879F97B5CBC}" type="slidenum">
               <a:rPr lang="en-US"/>
-              <a:t>18</a:t>
+              <a:t>19</a:t>
             </a:fld>
             <a:endParaRPr lang="en-US"/>
           </a:p>
@@ -1199,7 +1294,7 @@
 </p:notes>
 </file>
 
-<file path=ppt/notesSlides/notesSlide19.xml><?xml version="1.0" encoding="utf-8"?>
+<file path=ppt/notesSlides/notesSlide2.xml><?xml version="1.0" encoding="utf-8"?>
 <p:notes xmlns:a="http://schemas.openxmlformats.org/drawingml/2006/main" xmlns:r="http://schemas.openxmlformats.org/officeDocument/2006/relationships" xmlns:p="http://schemas.openxmlformats.org/presentationml/2006/main">
   <p:cSld>
     <p:spTree>
@@ -1264,7 +1359,7 @@
           <a:p>
             <a:fld id="{F7021451-1387-4CA6-816F-3879F97B5CBC}" type="slidenum">
               <a:rPr lang="en-US"/>
-              <a:t>19</a:t>
+              <a:t>2</a:t>
             </a:fld>
             <a:endParaRPr lang="en-US"/>
           </a:p>
@@ -1283,7 +1378,7 @@
 </p:notes>
 </file>
 
-<file path=ppt/notesSlides/notesSlide2.xml><?xml version="1.0" encoding="utf-8"?>
+<file path=ppt/notesSlides/notesSlide20.xml><?xml version="1.0" encoding="utf-8"?>
 <p:notes xmlns:a="http://schemas.openxmlformats.org/drawingml/2006/main" xmlns:r="http://schemas.openxmlformats.org/officeDocument/2006/relationships" xmlns:p="http://schemas.openxmlformats.org/presentationml/2006/main">
   <p:cSld>
     <p:spTree>
@@ -1327,17 +1422,7 @@
           <a:bodyPr/>
           <a:lstStyle/>
           <a:p>
-            <a:r>
-              <a:rPr lang="en-US" dirty="0"/>
-              <a:t>"In 2023, Member States issued more than 3.7 million residence permits to non-EU
-citizens from more than 170 countries."
-https://www.europarl.europa.eu/doceo/document/E-10-2025-000294-ASW_EN.html
----
-# Social Categorization
-Social categorization changes how people perceive, evaluate, remember, and treat
-one another (Amodio &amp; Cikara, 2021; Levy et al., 2023; Rhodes &amp; Baron, 2019)
----</a:t>
-            </a:r>
+            <a:endParaRPr lang="en-US" dirty="0"/>
           </a:p>
         </p:txBody>
       </p:sp>
@@ -1358,7 +1443,7 @@
           <a:p>
             <a:fld id="{F7021451-1387-4CA6-816F-3879F97B5CBC}" type="slidenum">
               <a:rPr lang="en-US"/>
-              <a:t>2</a:t>
+              <a:t>20</a:t>
             </a:fld>
             <a:endParaRPr lang="en-US"/>
           </a:p>
@@ -1377,7 +1462,91 @@
 </p:notes>
 </file>
 
-<file path=ppt/notesSlides/notesSlide20.xml><?xml version="1.0" encoding="utf-8"?>
+<file path=ppt/notesSlides/notesSlide21.xml><?xml version="1.0" encoding="utf-8"?>
+<p:notes xmlns:a="http://schemas.openxmlformats.org/drawingml/2006/main" xmlns:r="http://schemas.openxmlformats.org/officeDocument/2006/relationships" xmlns:p="http://schemas.openxmlformats.org/presentationml/2006/main">
+  <p:cSld>
+    <p:spTree>
+      <p:nvGrpSpPr>
+        <p:cNvPr id="1" name=""/>
+        <p:cNvGrpSpPr/>
+        <p:nvPr/>
+      </p:nvGrpSpPr>
+      <p:grpSpPr>
+        <a:xfrm>
+          <a:off x="0" y="0"/>
+          <a:ext cx="0" cy="0"/>
+          <a:chOff x="0" y="0"/>
+          <a:chExt cx="0" cy="0"/>
+        </a:xfrm>
+      </p:grpSpPr>
+      <p:sp>
+        <p:nvSpPr>
+          <p:cNvPr id="2" name="Slide Image Placeholder 1"/>
+          <p:cNvSpPr>
+            <a:spLocks noGrp="1" noRot="1" noChangeAspect="1"/>
+          </p:cNvSpPr>
+          <p:nvPr>
+            <p:ph type="sldImg"/>
+          </p:nvPr>
+        </p:nvSpPr>
+        <p:spPr/>
+      </p:sp>
+      <p:sp>
+        <p:nvSpPr>
+          <p:cNvPr id="3" name="Notes Placeholder 2"/>
+          <p:cNvSpPr>
+            <a:spLocks noGrp="1"/>
+          </p:cNvSpPr>
+          <p:nvPr>
+            <p:ph type="body" idx="1"/>
+          </p:nvPr>
+        </p:nvSpPr>
+        <p:spPr/>
+        <p:txBody>
+          <a:bodyPr/>
+          <a:lstStyle/>
+          <a:p>
+            <a:endParaRPr lang="en-US" dirty="0"/>
+          </a:p>
+        </p:txBody>
+      </p:sp>
+      <p:sp>
+        <p:nvSpPr>
+          <p:cNvPr id="4" name="Slide Number Placeholder 3"/>
+          <p:cNvSpPr>
+            <a:spLocks noGrp="1"/>
+          </p:cNvSpPr>
+          <p:nvPr>
+            <p:ph type="sldNum" sz="quarter" idx="10"/>
+          </p:nvPr>
+        </p:nvSpPr>
+        <p:spPr/>
+        <p:txBody>
+          <a:bodyPr/>
+          <a:lstStyle/>
+          <a:p>
+            <a:fld id="{F7021451-1387-4CA6-816F-3879F97B5CBC}" type="slidenum">
+              <a:rPr lang="en-US"/>
+              <a:t>21</a:t>
+            </a:fld>
+            <a:endParaRPr lang="en-US"/>
+          </a:p>
+        </p:txBody>
+      </p:sp>
+    </p:spTree>
+    <p:extLst>
+      <p:ext uri="{BB962C8B-B14F-4D97-AF65-F5344CB8AC3E}">
+        <p14:creationId xmlns:p14="http://schemas.microsoft.com/office/powerpoint/2010/main" val="1024086991"/>
+      </p:ext>
+    </p:extLst>
+  </p:cSld>
+  <p:clrMapOvr>
+    <a:masterClrMapping/>
+  </p:clrMapOvr>
+</p:notes>
+</file>
+
+<file path=ppt/notesSlides/notesSlide22.xml><?xml version="1.0" encoding="utf-8"?>
 <p:notes xmlns:a="http://schemas.openxmlformats.org/drawingml/2006/main" xmlns:r="http://schemas.openxmlformats.org/officeDocument/2006/relationships" xmlns:p="http://schemas.openxmlformats.org/presentationml/2006/main">
   <p:cSld>
     <p:spTree>
@@ -1464,7 +1633,7 @@
           <a:p>
             <a:fld id="{F7021451-1387-4CA6-816F-3879F97B5CBC}" type="slidenum">
               <a:rPr lang="en-US"/>
-              <a:t>20</a:t>
+              <a:t>22</a:t>
             </a:fld>
             <a:endParaRPr lang="en-US"/>
           </a:p>
@@ -1483,7 +1652,7 @@
 </p:notes>
 </file>
 
-<file path=ppt/notesSlides/notesSlide21.xml><?xml version="1.0" encoding="utf-8"?>
+<file path=ppt/notesSlides/notesSlide23.xml><?xml version="1.0" encoding="utf-8"?>
 <p:notes xmlns:a="http://schemas.openxmlformats.org/drawingml/2006/main" xmlns:r="http://schemas.openxmlformats.org/officeDocument/2006/relationships" xmlns:p="http://schemas.openxmlformats.org/presentationml/2006/main">
   <p:cSld>
     <p:spTree>
@@ -1548,7 +1717,7 @@
           <a:p>
             <a:fld id="{F7021451-1387-4CA6-816F-3879F97B5CBC}" type="slidenum">
               <a:rPr lang="en-US"/>
-              <a:t>21</a:t>
+              <a:t>23</a:t>
             </a:fld>
             <a:endParaRPr lang="en-US"/>
           </a:p>
@@ -1567,7 +1736,7 @@
 </p:notes>
 </file>
 
-<file path=ppt/notesSlides/notesSlide22.xml><?xml version="1.0" encoding="utf-8"?>
+<file path=ppt/notesSlides/notesSlide24.xml><?xml version="1.0" encoding="utf-8"?>
 <p:notes xmlns:a="http://schemas.openxmlformats.org/drawingml/2006/main" xmlns:r="http://schemas.openxmlformats.org/officeDocument/2006/relationships" xmlns:p="http://schemas.openxmlformats.org/presentationml/2006/main">
   <p:cSld>
     <p:spTree>
@@ -1632,7 +1801,7 @@
           <a:p>
             <a:fld id="{F7021451-1387-4CA6-816F-3879F97B5CBC}" type="slidenum">
               <a:rPr lang="en-US"/>
-              <a:t>22</a:t>
+              <a:t>24</a:t>
             </a:fld>
             <a:endParaRPr lang="en-US"/>
           </a:p>
@@ -1651,6 +1820,90 @@
 </p:notes>
 </file>
 
+<file path=ppt/notesSlides/notesSlide25.xml><?xml version="1.0" encoding="utf-8"?>
+<p:notes xmlns:a="http://schemas.openxmlformats.org/drawingml/2006/main" xmlns:r="http://schemas.openxmlformats.org/officeDocument/2006/relationships" xmlns:p="http://schemas.openxmlformats.org/presentationml/2006/main">
+  <p:cSld>
+    <p:spTree>
+      <p:nvGrpSpPr>
+        <p:cNvPr id="1" name=""/>
+        <p:cNvGrpSpPr/>
+        <p:nvPr/>
+      </p:nvGrpSpPr>
+      <p:grpSpPr>
+        <a:xfrm>
+          <a:off x="0" y="0"/>
+          <a:ext cx="0" cy="0"/>
+          <a:chOff x="0" y="0"/>
+          <a:chExt cx="0" cy="0"/>
+        </a:xfrm>
+      </p:grpSpPr>
+      <p:sp>
+        <p:nvSpPr>
+          <p:cNvPr id="2" name="Slide Image Placeholder 1"/>
+          <p:cNvSpPr>
+            <a:spLocks noGrp="1" noRot="1" noChangeAspect="1"/>
+          </p:cNvSpPr>
+          <p:nvPr>
+            <p:ph type="sldImg"/>
+          </p:nvPr>
+        </p:nvSpPr>
+        <p:spPr/>
+      </p:sp>
+      <p:sp>
+        <p:nvSpPr>
+          <p:cNvPr id="3" name="Notes Placeholder 2"/>
+          <p:cNvSpPr>
+            <a:spLocks noGrp="1"/>
+          </p:cNvSpPr>
+          <p:nvPr>
+            <p:ph type="body" idx="1"/>
+          </p:nvPr>
+        </p:nvSpPr>
+        <p:spPr/>
+        <p:txBody>
+          <a:bodyPr/>
+          <a:lstStyle/>
+          <a:p>
+            <a:endParaRPr lang="en-US" dirty="0"/>
+          </a:p>
+        </p:txBody>
+      </p:sp>
+      <p:sp>
+        <p:nvSpPr>
+          <p:cNvPr id="4" name="Slide Number Placeholder 3"/>
+          <p:cNvSpPr>
+            <a:spLocks noGrp="1"/>
+          </p:cNvSpPr>
+          <p:nvPr>
+            <p:ph type="sldNum" sz="quarter" idx="10"/>
+          </p:nvPr>
+        </p:nvSpPr>
+        <p:spPr/>
+        <p:txBody>
+          <a:bodyPr/>
+          <a:lstStyle/>
+          <a:p>
+            <a:fld id="{F7021451-1387-4CA6-816F-3879F97B5CBC}" type="slidenum">
+              <a:rPr lang="en-US"/>
+              <a:t>25</a:t>
+            </a:fld>
+            <a:endParaRPr lang="en-US"/>
+          </a:p>
+        </p:txBody>
+      </p:sp>
+    </p:spTree>
+    <p:extLst>
+      <p:ext uri="{BB962C8B-B14F-4D97-AF65-F5344CB8AC3E}">
+        <p14:creationId xmlns:p14="http://schemas.microsoft.com/office/powerpoint/2010/main" val="1024086991"/>
+      </p:ext>
+    </p:extLst>
+  </p:cSld>
+  <p:clrMapOvr>
+    <a:masterClrMapping/>
+  </p:clrMapOvr>
+</p:notes>
+</file>
+
 <file path=ppt/notesSlides/notesSlide3.xml><?xml version="1.0" encoding="utf-8"?>
 <p:notes xmlns:a="http://schemas.openxmlformats.org/drawingml/2006/main" xmlns:r="http://schemas.openxmlformats.org/officeDocument/2006/relationships" xmlns:p="http://schemas.openxmlformats.org/presentationml/2006/main">
   <p:cSld>
@@ -1779,11 +2032,7 @@
           <a:bodyPr/>
           <a:lstStyle/>
           <a:p>
-            <a:r>
-              <a:rPr lang="en-US" dirty="0"/>
-              <a:t>Speaker Notes
-Decades of research show that infants display early visual specialization for ingroup faces, leading to the Perceptual-Social Linkage hypothesis. Yet, when we look at childhood, specifically ages 3 to 8, the evidence for the Outgroup Homogeneity Effect becomes inconsistent. We hypothesize that traditional tasks force children into rigid, explicit categories and may not capture how they spontaneously perceive social groups.</a:t>
-            </a:r>
+            <a:endParaRPr lang="en-US" dirty="0"/>
           </a:p>
         </p:txBody>
       </p:sp>
@@ -3104,6 +3353,123 @@
 <file path=ppt/slides/slide22.xml><?xml version="1.0" encoding="utf-8"?>
 <p:sld xmlns:a="http://schemas.openxmlformats.org/drawingml/2006/main" xmlns:r="http://schemas.openxmlformats.org/officeDocument/2006/relationships" xmlns:p="http://schemas.openxmlformats.org/presentationml/2006/main">
   <p:cSld name="Slide 22">
+    <p:bg>
+      <p:bgPr>
+        <a:blipFill dpi="0" rotWithShape="1">
+          <a:blip r:embed="rId3">
+            <a:lum/>
+          </a:blip>
+          <a:srcRect/>
+          <a:stretch>
+            <a:fillRect/>
+          </a:stretch>
+        </a:blipFill>
+        <a:effectLst/>
+      </p:bgPr>
+    </p:bg>
+    <p:spTree>
+      <p:nvGrpSpPr>
+        <p:cNvPr id="1" name=""/>
+        <p:cNvGrpSpPr/>
+        <p:nvPr/>
+      </p:nvGrpSpPr>
+      <p:grpSpPr>
+        <a:xfrm>
+          <a:off x="0" y="0"/>
+          <a:ext cx="0" cy="0"/>
+          <a:chOff x="0" y="0"/>
+          <a:chExt cx="0" cy="0"/>
+        </a:xfrm>
+      </p:grpSpPr>
+    </p:spTree>
+  </p:cSld>
+  <p:clrMapOvr>
+    <a:masterClrMapping/>
+  </p:clrMapOvr>
+</p:sld>
+</file>
+
+<file path=ppt/slides/slide23.xml><?xml version="1.0" encoding="utf-8"?>
+<p:sld xmlns:a="http://schemas.openxmlformats.org/drawingml/2006/main" xmlns:r="http://schemas.openxmlformats.org/officeDocument/2006/relationships" xmlns:p="http://schemas.openxmlformats.org/presentationml/2006/main">
+  <p:cSld name="Slide 23">
+    <p:bg>
+      <p:bgPr>
+        <a:blipFill dpi="0" rotWithShape="1">
+          <a:blip r:embed="rId3">
+            <a:lum/>
+          </a:blip>
+          <a:srcRect/>
+          <a:stretch>
+            <a:fillRect/>
+          </a:stretch>
+        </a:blipFill>
+        <a:effectLst/>
+      </p:bgPr>
+    </p:bg>
+    <p:spTree>
+      <p:nvGrpSpPr>
+        <p:cNvPr id="1" name=""/>
+        <p:cNvGrpSpPr/>
+        <p:nvPr/>
+      </p:nvGrpSpPr>
+      <p:grpSpPr>
+        <a:xfrm>
+          <a:off x="0" y="0"/>
+          <a:ext cx="0" cy="0"/>
+          <a:chOff x="0" y="0"/>
+          <a:chExt cx="0" cy="0"/>
+        </a:xfrm>
+      </p:grpSpPr>
+    </p:spTree>
+  </p:cSld>
+  <p:clrMapOvr>
+    <a:masterClrMapping/>
+  </p:clrMapOvr>
+</p:sld>
+</file>
+
+<file path=ppt/slides/slide24.xml><?xml version="1.0" encoding="utf-8"?>
+<p:sld xmlns:a="http://schemas.openxmlformats.org/drawingml/2006/main" xmlns:r="http://schemas.openxmlformats.org/officeDocument/2006/relationships" xmlns:p="http://schemas.openxmlformats.org/presentationml/2006/main">
+  <p:cSld name="Slide 24">
+    <p:bg>
+      <p:bgPr>
+        <a:blipFill dpi="0" rotWithShape="1">
+          <a:blip r:embed="rId3">
+            <a:lum/>
+          </a:blip>
+          <a:srcRect/>
+          <a:stretch>
+            <a:fillRect/>
+          </a:stretch>
+        </a:blipFill>
+        <a:effectLst/>
+      </p:bgPr>
+    </p:bg>
+    <p:spTree>
+      <p:nvGrpSpPr>
+        <p:cNvPr id="1" name=""/>
+        <p:cNvGrpSpPr/>
+        <p:nvPr/>
+      </p:nvGrpSpPr>
+      <p:grpSpPr>
+        <a:xfrm>
+          <a:off x="0" y="0"/>
+          <a:ext cx="0" cy="0"/>
+          <a:chOff x="0" y="0"/>
+          <a:chExt cx="0" cy="0"/>
+        </a:xfrm>
+      </p:grpSpPr>
+    </p:spTree>
+  </p:cSld>
+  <p:clrMapOvr>
+    <a:masterClrMapping/>
+  </p:clrMapOvr>
+</p:sld>
+</file>
+
+<file path=ppt/slides/slide25.xml><?xml version="1.0" encoding="utf-8"?>
+<p:sld xmlns:a="http://schemas.openxmlformats.org/drawingml/2006/main" xmlns:r="http://schemas.openxmlformats.org/officeDocument/2006/relationships" xmlns:p="http://schemas.openxmlformats.org/presentationml/2006/main">
+  <p:cSld name="Slide 25">
     <p:bg>
       <p:bgPr>
         <a:blipFill dpi="0" rotWithShape="1">

--- a/presentation.pptx
+++ b/presentation.pptx
@@ -4,9 +4,6 @@
   <p:sldMasterIdLst>
     <p:sldMasterId id="2147483648" r:id="rId1"/>
   </p:sldMasterIdLst>
-  <p:notesMasterIdLst>
-    <p:notesMasterId r:id="rId27"/>
-  </p:notesMasterIdLst>
   <p:sldIdLst>
     <p:sldId id="256" r:id="rId2"/>
     <p:sldId id="257" r:id="rId3"/>
@@ -33,7 +30,12 @@
     <p:sldId id="278" r:id="rId24"/>
     <p:sldId id="279" r:id="rId25"/>
     <p:sldId id="280" r:id="rId26"/>
+    <p:sldId id="281" r:id="rId27"/>
+    <p:sldId id="282" r:id="rId28"/>
   </p:sldIdLst>
+  <p:notesMasterIdLst>
+    <p:notesMasterId r:id="rId29"/>
+  </p:notesMasterIdLst>
   <p:sldSz cx="12192000" cy="6858000"/>
   <p:notesSz cx="6858000" cy="12192000"/>
   <p:defaultTextStyle>
@@ -128,57 +130,7 @@
       </a:defRPr>
     </a:lvl9pPr>
   </p:defaultTextStyle>
-  <p:extLst>
-    <p:ext uri="{EFAFB233-063F-42B5-8137-9DF3F51BA10A}">
-      <p15:sldGuideLst xmlns:p15="http://schemas.microsoft.com/office/powerpoint/2012/main"/>
-    </p:ext>
-  </p:extLst>
 </p:presentation>
-</file>
-
-<file path=ppt/revisionInfo.xml><?xml version="1.0" encoding="utf-8"?>
-<p1510:revInfo xmlns:a="http://schemas.openxmlformats.org/drawingml/2006/main" xmlns:r="http://schemas.openxmlformats.org/officeDocument/2006/relationships" xmlns:p1510="http://schemas.microsoft.com/office/powerpoint/2015/10/main">
-  <p1510:revLst>
-    <p1510:client id="{0480EFB2-A787-4DB4-BADF-BE07FA50DFAD}" v="2" dt="2026-09-08T13:04:02.163"/>
-  </p1510:revLst>
-</p1510:revInfo>
-</file>
-
-<file path=ppt/changesInfos/changesInfo1.xml><?xml version="1.0" encoding="utf-8"?>
-<pc:chgInfo xmlns:a="http://schemas.openxmlformats.org/drawingml/2006/main" xmlns:r="http://schemas.openxmlformats.org/officeDocument/2006/relationships" xmlns:ac="http://schemas.microsoft.com/office/drawing/2013/main/command" xmlns:pc="http://schemas.microsoft.com/office/powerpoint/2013/main/command">
-  <pc:docChgLst>
-    <pc:chgData name="Luca Cussigh" userId="368af960-6488-4d64-b4ce-638e2566cd2b" providerId="ADAL" clId="{F11DC404-7128-42C3-A4C0-983A4FB681AD}"/>
-    <pc:docChg chg="modSld">
-      <pc:chgData name="Luca Cussigh" userId="368af960-6488-4d64-b4ce-638e2566cd2b" providerId="ADAL" clId="{F11DC404-7128-42C3-A4C0-983A4FB681AD}" dt="2026-09-08T13:04:03.207" v="5"/>
-      <pc:docMkLst>
-        <pc:docMk/>
-      </pc:docMkLst>
-      <pc:sldChg chg="addSp delSp modSp mod">
-        <pc:chgData name="Luca Cussigh" userId="368af960-6488-4d64-b4ce-638e2566cd2b" providerId="ADAL" clId="{F11DC404-7128-42C3-A4C0-983A4FB681AD}" dt="2026-09-08T13:04:03.207" v="5"/>
-        <pc:sldMkLst>
-          <pc:docMk/>
-          <pc:sldMk cId="0" sldId="257"/>
-        </pc:sldMkLst>
-        <pc:spChg chg="add del mod">
-          <ac:chgData name="Luca Cussigh" userId="368af960-6488-4d64-b4ce-638e2566cd2b" providerId="ADAL" clId="{F11DC404-7128-42C3-A4C0-983A4FB681AD}" dt="2026-09-08T13:04:01.314" v="2"/>
-          <ac:spMkLst>
-            <pc:docMk/>
-            <pc:sldMk cId="0" sldId="257"/>
-            <ac:spMk id="2" creationId="{30002FBA-F6C0-3898-338E-CBDEF4C301C8}"/>
-          </ac:spMkLst>
-        </pc:spChg>
-        <pc:spChg chg="add del mod">
-          <ac:chgData name="Luca Cussigh" userId="368af960-6488-4d64-b4ce-638e2566cd2b" providerId="ADAL" clId="{F11DC404-7128-42C3-A4C0-983A4FB681AD}" dt="2026-09-08T13:04:03.207" v="5"/>
-          <ac:spMkLst>
-            <pc:docMk/>
-            <pc:sldMk cId="0" sldId="257"/>
-            <ac:spMk id="3" creationId="{4BE5B766-CCCC-C8E8-D3B0-3D1D9C5AE418}"/>
-          </ac:spMkLst>
-        </pc:spChg>
-      </pc:sldChg>
-    </pc:docChg>
-  </pc:docChgLst>
-</pc:chgInfo>
 </file>
 
 <file path=ppt/notesMasters/notesMaster1.xml><?xml version="1.0" encoding="utf-8"?>
@@ -203,10 +155,234 @@
           <a:chExt cx="0" cy="0"/>
         </a:xfrm>
       </p:grpSpPr>
+      <p:sp>
+        <p:nvSpPr>
+          <p:cNvPr id="2" name="Header Placeholder 1"/>
+          <p:cNvSpPr>
+            <a:spLocks noGrp="1"/>
+          </p:cNvSpPr>
+          <p:nvPr>
+            <p:ph type="hdr" sz="quarter"/>
+          </p:nvPr>
+        </p:nvSpPr>
+        <p:spPr>
+          <a:xfrm>
+            <a:off x="0" y="0"/>
+            <a:ext cx="2971800" cy="458788"/>
+          </a:xfrm>
+          <a:prstGeom prst="rect">
+            <a:avLst/>
+          </a:prstGeom>
+        </p:spPr>
+        <p:txBody>
+          <a:bodyPr vert="horz" lIns="91440" tIns="45720" rIns="91440" bIns="45720" rtlCol="0"/>
+          <a:lstStyle>
+            <a:lvl1pPr algn="l">
+              <a:defRPr sz="1200"/>
+            </a:lvl1pPr>
+          </a:lstStyle>
+          <a:p>
+            <a:endParaRPr lang="en-US"/>
+          </a:p>
+        </p:txBody>
+      </p:sp>
+      <p:sp>
+        <p:nvSpPr>
+          <p:cNvPr id="3" name="Date Placeholder 2"/>
+          <p:cNvSpPr>
+            <a:spLocks noGrp="1"/>
+          </p:cNvSpPr>
+          <p:nvPr>
+            <p:ph type="dt" idx="1"/>
+          </p:nvPr>
+        </p:nvSpPr>
+        <p:spPr>
+          <a:xfrm>
+            <a:off x="3884613" y="0"/>
+            <a:ext cx="2971800" cy="458788"/>
+          </a:xfrm>
+          <a:prstGeom prst="rect">
+            <a:avLst/>
+          </a:prstGeom>
+        </p:spPr>
+        <p:txBody>
+          <a:bodyPr vert="horz" lIns="91440" tIns="45720" rIns="91440" bIns="45720" rtlCol="0"/>
+          <a:lstStyle>
+            <a:lvl1pPr algn="r">
+              <a:defRPr sz="1200"/>
+            </a:lvl1pPr>
+          </a:lstStyle>
+          <a:p>
+            <a:fld id="{5282F153-3F37-0F45-9E97-73ACFA13230C}" type="datetimeFigureOut">
+              <a:rPr lang="en-US"/>
+              <a:t>7/23/19</a:t>
+            </a:fld>
+            <a:endParaRPr lang="en-US"/>
+          </a:p>
+        </p:txBody>
+      </p:sp>
+      <p:sp>
+        <p:nvSpPr>
+          <p:cNvPr id="4" name="Slide Image Placeholder 3"/>
+          <p:cNvSpPr>
+            <a:spLocks noGrp="1" noRot="1" noChangeAspect="1"/>
+          </p:cNvSpPr>
+          <p:nvPr>
+            <p:ph type="sldImg" idx="2"/>
+          </p:nvPr>
+        </p:nvSpPr>
+        <p:spPr>
+          <a:xfrm>
+            <a:off x="685800" y="1143000"/>
+            <a:ext cx="5486400" cy="3086100"/>
+          </a:xfrm>
+          <a:prstGeom prst="rect">
+            <a:avLst/>
+          </a:prstGeom>
+          <a:noFill/>
+          <a:ln w="12700">
+            <a:solidFill>
+              <a:prstClr val="black"/>
+            </a:solidFill>
+          </a:ln>
+        </p:spPr>
+        <p:txBody>
+          <a:bodyPr vert="horz" lIns="91440" tIns="45720" rIns="91440" bIns="45720" rtlCol="0" anchor="ctr"/>
+          <a:lstStyle/>
+          <a:p>
+            <a:endParaRPr lang="en-US"/>
+          </a:p>
+        </p:txBody>
+      </p:sp>
+      <p:sp>
+        <p:nvSpPr>
+          <p:cNvPr id="5" name="Notes Placeholder 4"/>
+          <p:cNvSpPr>
+            <a:spLocks noGrp="1"/>
+          </p:cNvSpPr>
+          <p:nvPr>
+            <p:ph type="body" sz="quarter" idx="3"/>
+          </p:nvPr>
+        </p:nvSpPr>
+        <p:spPr>
+          <a:xfrm>
+            <a:off x="685800" y="4400550"/>
+            <a:ext cx="5486400" cy="3600450"/>
+          </a:xfrm>
+          <a:prstGeom prst="rect">
+            <a:avLst/>
+          </a:prstGeom>
+        </p:spPr>
+        <p:txBody>
+          <a:bodyPr vert="horz" lIns="91440" tIns="45720" rIns="91440" bIns="45720" rtlCol="0"/>
+          <a:lstStyle/>
+          <a:p>
+            <a:pPr lvl="0"/>
+            <a:r>
+              <a:rPr lang="en-US"/>
+              <a:t>Click to edit Master text styles</a:t>
+            </a:r>
+          </a:p>
+          <a:p>
+            <a:pPr lvl="1"/>
+            <a:r>
+              <a:rPr lang="en-US"/>
+              <a:t>Second level</a:t>
+            </a:r>
+          </a:p>
+          <a:p>
+            <a:pPr lvl="2"/>
+            <a:r>
+              <a:rPr lang="en-US"/>
+              <a:t>Third level</a:t>
+            </a:r>
+          </a:p>
+          <a:p>
+            <a:pPr lvl="3"/>
+            <a:r>
+              <a:rPr lang="en-US"/>
+              <a:t>Fourth level</a:t>
+            </a:r>
+          </a:p>
+          <a:p>
+            <a:pPr lvl="4"/>
+            <a:r>
+              <a:rPr lang="en-US"/>
+              <a:t>Fifth level</a:t>
+            </a:r>
+          </a:p>
+        </p:txBody>
+      </p:sp>
+      <p:sp>
+        <p:nvSpPr>
+          <p:cNvPr id="6" name="Footer Placeholder 5"/>
+          <p:cNvSpPr>
+            <a:spLocks noGrp="1"/>
+          </p:cNvSpPr>
+          <p:nvPr>
+            <p:ph type="ftr" sz="quarter" idx="4"/>
+          </p:nvPr>
+        </p:nvSpPr>
+        <p:spPr>
+          <a:xfrm>
+            <a:off x="0" y="8685213"/>
+            <a:ext cx="2971800" cy="458787"/>
+          </a:xfrm>
+          <a:prstGeom prst="rect">
+            <a:avLst/>
+          </a:prstGeom>
+        </p:spPr>
+        <p:txBody>
+          <a:bodyPr vert="horz" lIns="91440" tIns="45720" rIns="91440" bIns="45720" rtlCol="0" anchor="b"/>
+          <a:lstStyle>
+            <a:lvl1pPr algn="l">
+              <a:defRPr sz="1200"/>
+            </a:lvl1pPr>
+          </a:lstStyle>
+          <a:p>
+            <a:endParaRPr lang="en-US"/>
+          </a:p>
+        </p:txBody>
+      </p:sp>
+      <p:sp>
+        <p:nvSpPr>
+          <p:cNvPr id="7" name="Slide Number Placeholder 6"/>
+          <p:cNvSpPr>
+            <a:spLocks noGrp="1"/>
+          </p:cNvSpPr>
+          <p:nvPr>
+            <p:ph type="sldNum" sz="quarter" idx="5"/>
+          </p:nvPr>
+        </p:nvSpPr>
+        <p:spPr>
+          <a:xfrm>
+            <a:off x="3884613" y="8685213"/>
+            <a:ext cx="2971800" cy="458787"/>
+          </a:xfrm>
+          <a:prstGeom prst="rect">
+            <a:avLst/>
+          </a:prstGeom>
+        </p:spPr>
+        <p:txBody>
+          <a:bodyPr vert="horz" lIns="91440" tIns="45720" rIns="91440" bIns="45720" rtlCol="0" anchor="b"/>
+          <a:lstStyle>
+            <a:lvl1pPr algn="r">
+              <a:defRPr sz="1200"/>
+            </a:lvl1pPr>
+          </a:lstStyle>
+          <a:p>
+            <a:fld id="{CE5E9CC1-C706-0F49-92D6-E571CC5EEA8F}" type="slidenum">
+              <a:rPr lang="en-US"/>
+              <a:t>‹#›</a:t>
+            </a:fld>
+            <a:endParaRPr lang="en-US"/>
+          </a:p>
+        </p:txBody>
+      </p:sp>
     </p:spTree>
     <p:extLst>
       <p:ext uri="{BB962C8B-B14F-4D97-AF65-F5344CB8AC3E}">
-        <p14:creationId xmlns:p14="http://schemas.microsoft.com/office/powerpoint/2010/main" val="120905468"/>
+        <p14:creationId xmlns:p14="http://schemas.microsoft.com/office/powerpoint/2010/main" val="1024086991"/>
       </p:ext>
     </p:extLst>
   </p:cSld>
@@ -350,6 +526,10 @@
           <a:bodyPr/>
           <a:lstStyle/>
           <a:p>
+            <a:r>
+              <a:rPr lang="en-US" dirty="0"/>
+              <a:t/>
+            </a:r>
             <a:endParaRPr lang="en-US" dirty="0"/>
           </a:p>
         </p:txBody>
@@ -434,6 +614,10 @@
           <a:bodyPr/>
           <a:lstStyle/>
           <a:p>
+            <a:r>
+              <a:rPr lang="en-US" dirty="0"/>
+              <a:t/>
+            </a:r>
             <a:endParaRPr lang="en-US" dirty="0"/>
           </a:p>
         </p:txBody>
@@ -475,6 +659,94 @@
 </file>
 
 <file path=ppt/notesSlides/notesSlide11.xml><?xml version="1.0" encoding="utf-8"?>
+<p:notes xmlns:a="http://schemas.openxmlformats.org/drawingml/2006/main" xmlns:r="http://schemas.openxmlformats.org/officeDocument/2006/relationships" xmlns:p="http://schemas.openxmlformats.org/presentationml/2006/main">
+  <p:cSld>
+    <p:spTree>
+      <p:nvGrpSpPr>
+        <p:cNvPr id="1" name=""/>
+        <p:cNvGrpSpPr/>
+        <p:nvPr/>
+      </p:nvGrpSpPr>
+      <p:grpSpPr>
+        <a:xfrm>
+          <a:off x="0" y="0"/>
+          <a:ext cx="0" cy="0"/>
+          <a:chOff x="0" y="0"/>
+          <a:chExt cx="0" cy="0"/>
+        </a:xfrm>
+      </p:grpSpPr>
+      <p:sp>
+        <p:nvSpPr>
+          <p:cNvPr id="2" name="Slide Image Placeholder 1"/>
+          <p:cNvSpPr>
+            <a:spLocks noGrp="1" noRot="1" noChangeAspect="1"/>
+          </p:cNvSpPr>
+          <p:nvPr>
+            <p:ph type="sldImg"/>
+          </p:nvPr>
+        </p:nvSpPr>
+        <p:spPr/>
+      </p:sp>
+      <p:sp>
+        <p:nvSpPr>
+          <p:cNvPr id="3" name="Notes Placeholder 2"/>
+          <p:cNvSpPr>
+            <a:spLocks noGrp="1"/>
+          </p:cNvSpPr>
+          <p:nvPr>
+            <p:ph type="body" idx="1"/>
+          </p:nvPr>
+        </p:nvSpPr>
+        <p:spPr/>
+        <p:txBody>
+          <a:bodyPr/>
+          <a:lstStyle/>
+          <a:p>
+            <a:r>
+              <a:rPr lang="en-US" dirty="0"/>
+              <a:t/>
+            </a:r>
+            <a:endParaRPr lang="en-US" dirty="0"/>
+          </a:p>
+        </p:txBody>
+      </p:sp>
+      <p:sp>
+        <p:nvSpPr>
+          <p:cNvPr id="4" name="Slide Number Placeholder 3"/>
+          <p:cNvSpPr>
+            <a:spLocks noGrp="1"/>
+          </p:cNvSpPr>
+          <p:nvPr>
+            <p:ph type="sldNum" sz="quarter" idx="10"/>
+          </p:nvPr>
+        </p:nvSpPr>
+        <p:spPr/>
+        <p:txBody>
+          <a:bodyPr/>
+          <a:lstStyle/>
+          <a:p>
+            <a:fld id="{F7021451-1387-4CA6-816F-3879F97B5CBC}" type="slidenum">
+              <a:rPr lang="en-US"/>
+              <a:t>11</a:t>
+            </a:fld>
+            <a:endParaRPr lang="en-US"/>
+          </a:p>
+        </p:txBody>
+      </p:sp>
+    </p:spTree>
+    <p:extLst>
+      <p:ext uri="{BB962C8B-B14F-4D97-AF65-F5344CB8AC3E}">
+        <p14:creationId xmlns:p14="http://schemas.microsoft.com/office/powerpoint/2010/main" val="1024086991"/>
+      </p:ext>
+    </p:extLst>
+  </p:cSld>
+  <p:clrMapOvr>
+    <a:masterClrMapping/>
+  </p:clrMapOvr>
+</p:notes>
+</file>
+
+<file path=ppt/notesSlides/notesSlide12.xml><?xml version="1.0" encoding="utf-8"?>
 <p:notes xmlns:a="http://schemas.openxmlformats.org/drawingml/2006/main" xmlns:r="http://schemas.openxmlformats.org/officeDocument/2006/relationships" xmlns:p="http://schemas.openxmlformats.org/presentationml/2006/main">
   <p:cSld>
     <p:spTree>
@@ -528,6 +800,7 @@
 - Narrative: "Oscar the meerkat" task (no explicit ethnic labels)
 - Children evaluate face pairs without social priming</a:t>
             </a:r>
+            <a:endParaRPr lang="en-US" dirty="0"/>
           </a:p>
         </p:txBody>
       </p:sp>
@@ -548,7 +821,7 @@
           <a:p>
             <a:fld id="{F7021451-1387-4CA6-816F-3879F97B5CBC}" type="slidenum">
               <a:rPr lang="en-US"/>
-              <a:t>11</a:t>
+              <a:t>12</a:t>
             </a:fld>
             <a:endParaRPr lang="en-US"/>
           </a:p>
@@ -567,7 +840,7 @@
 </p:notes>
 </file>
 
-<file path=ppt/notesSlides/notesSlide12.xml><?xml version="1.0" encoding="utf-8"?>
+<file path=ppt/notesSlides/notesSlide13.xml><?xml version="1.0" encoding="utf-8"?>
 <p:notes xmlns:a="http://schemas.openxmlformats.org/drawingml/2006/main" xmlns:r="http://schemas.openxmlformats.org/officeDocument/2006/relationships" xmlns:p="http://schemas.openxmlformats.org/presentationml/2006/main">
   <p:cSld>
     <p:spTree>
@@ -611,6 +884,10 @@
           <a:bodyPr/>
           <a:lstStyle/>
           <a:p>
+            <a:r>
+              <a:rPr lang="en-US" dirty="0"/>
+              <a:t/>
+            </a:r>
             <a:endParaRPr lang="en-US" dirty="0"/>
           </a:p>
         </p:txBody>
@@ -632,7 +909,7 @@
           <a:p>
             <a:fld id="{F7021451-1387-4CA6-816F-3879F97B5CBC}" type="slidenum">
               <a:rPr lang="en-US"/>
-              <a:t>12</a:t>
+              <a:t>13</a:t>
             </a:fld>
             <a:endParaRPr lang="en-US"/>
           </a:p>
@@ -651,7 +928,7 @@
 </p:notes>
 </file>
 
-<file path=ppt/notesSlides/notesSlide13.xml><?xml version="1.0" encoding="utf-8"?>
+<file path=ppt/notesSlides/notesSlide14.xml><?xml version="1.0" encoding="utf-8"?>
 <p:notes xmlns:a="http://schemas.openxmlformats.org/drawingml/2006/main" xmlns:r="http://schemas.openxmlformats.org/officeDocument/2006/relationships" xmlns:p="http://schemas.openxmlformats.org/presentationml/2006/main">
   <p:cSld>
     <p:spTree>
@@ -710,6 +987,7 @@
  Speaker Notes
 A critical question is whether these findings depend on the specific testing context. When we aligned the spatial maps from both studies using Procrustes analysis, they overlapped remarkably well. The Tucker congruence coefficients exceeded 0.93, which is well above the threshold for excellent agreement. Mantel tests confirmed that the rank-order distances between groups were consistent across contexts. This replication is crucial—it suggests that the perceptual structures we identified are genuine features of how children organize faces, not artifacts created by experimenter presence or online testing constraints.</a:t>
             </a:r>
+            <a:endParaRPr lang="en-US" dirty="0"/>
           </a:p>
         </p:txBody>
       </p:sp>
@@ -730,7 +1008,7 @@
           <a:p>
             <a:fld id="{F7021451-1387-4CA6-816F-3879F97B5CBC}" type="slidenum">
               <a:rPr lang="en-US"/>
-              <a:t>13</a:t>
+              <a:t>14</a:t>
             </a:fld>
             <a:endParaRPr lang="en-US"/>
           </a:p>
@@ -749,7 +1027,7 @@
 </p:notes>
 </file>
 
-<file path=ppt/notesSlides/notesSlide14.xml><?xml version="1.0" encoding="utf-8"?>
+<file path=ppt/notesSlides/notesSlide15.xml><?xml version="1.0" encoding="utf-8"?>
 <p:notes xmlns:a="http://schemas.openxmlformats.org/drawingml/2006/main" xmlns:r="http://schemas.openxmlformats.org/officeDocument/2006/relationships" xmlns:p="http://schemas.openxmlformats.org/presentationml/2006/main">
   <p:cSld>
     <p:spTree>
@@ -793,6 +1071,10 @@
           <a:bodyPr/>
           <a:lstStyle/>
           <a:p>
+            <a:r>
+              <a:rPr lang="en-US" dirty="0"/>
+              <a:t/>
+            </a:r>
             <a:endParaRPr lang="en-US" dirty="0"/>
           </a:p>
         </p:txBody>
@@ -814,7 +1096,7 @@
           <a:p>
             <a:fld id="{F7021451-1387-4CA6-816F-3879F97B5CBC}" type="slidenum">
               <a:rPr lang="en-US"/>
-              <a:t>14</a:t>
+              <a:t>15</a:t>
             </a:fld>
             <a:endParaRPr lang="en-US"/>
           </a:p>
@@ -833,7 +1115,7 @@
 </p:notes>
 </file>
 
-<file path=ppt/notesSlides/notesSlide15.xml><?xml version="1.0" encoding="utf-8"?>
+<file path=ppt/notesSlides/notesSlide16.xml><?xml version="1.0" encoding="utf-8"?>
 <p:notes xmlns:a="http://schemas.openxmlformats.org/drawingml/2006/main" xmlns:r="http://schemas.openxmlformats.org/officeDocument/2006/relationships" xmlns:p="http://schemas.openxmlformats.org/presentationml/2006/main">
   <p:cSld>
     <p:spTree>
@@ -919,6 +1201,7 @@
 &lt;!-- Speaker Notes
 Regarding the Minority-Groups Homogeneity Effect, we found it wasn't supported either. The African Descent group, for instance, was perceptually quite distant from both East Asian and Andean groups—they didn't cluster together as a unified "outgroup." This tells us that children are sensitive to the specific perceptual characteristics of each ethnic group and don't collapse multiple outgroups into a homogeneous "other." The multigroup perceptual space is richer and more nuanced than traditional categorization models suggest.</a:t>
             </a:r>
+            <a:endParaRPr lang="en-US" dirty="0"/>
           </a:p>
         </p:txBody>
       </p:sp>
@@ -939,7 +1222,7 @@
           <a:p>
             <a:fld id="{F7021451-1387-4CA6-816F-3879F97B5CBC}" type="slidenum">
               <a:rPr lang="en-US"/>
-              <a:t>15</a:t>
+              <a:t>16</a:t>
             </a:fld>
             <a:endParaRPr lang="en-US"/>
           </a:p>
@@ -958,7 +1241,7 @@
 </p:notes>
 </file>
 
-<file path=ppt/notesSlides/notesSlide16.xml><?xml version="1.0" encoding="utf-8"?>
+<file path=ppt/notesSlides/notesSlide17.xml><?xml version="1.0" encoding="utf-8"?>
 <p:notes xmlns:a="http://schemas.openxmlformats.org/drawingml/2006/main" xmlns:r="http://schemas.openxmlformats.org/officeDocument/2006/relationships" xmlns:p="http://schemas.openxmlformats.org/presentationml/2006/main">
   <p:cSld>
     <p:spTree>
@@ -1002,6 +1285,10 @@
           <a:bodyPr/>
           <a:lstStyle/>
           <a:p>
+            <a:r>
+              <a:rPr lang="en-US" dirty="0"/>
+              <a:t/>
+            </a:r>
             <a:endParaRPr lang="en-US" dirty="0"/>
           </a:p>
         </p:txBody>
@@ -1023,7 +1310,7 @@
           <a:p>
             <a:fld id="{F7021451-1387-4CA6-816F-3879F97B5CBC}" type="slidenum">
               <a:rPr lang="en-US"/>
-              <a:t>16</a:t>
+              <a:t>17</a:t>
             </a:fld>
             <a:endParaRPr lang="en-US"/>
           </a:p>
@@ -1042,7 +1329,7 @@
 </p:notes>
 </file>
 
-<file path=ppt/notesSlides/notesSlide17.xml><?xml version="1.0" encoding="utf-8"?>
+<file path=ppt/notesSlides/notesSlide18.xml><?xml version="1.0" encoding="utf-8"?>
 <p:notes xmlns:a="http://schemas.openxmlformats.org/drawingml/2006/main" xmlns:r="http://schemas.openxmlformats.org/officeDocument/2006/relationships" xmlns:p="http://schemas.openxmlformats.org/presentationml/2006/main">
   <p:cSld>
     <p:spTree>
@@ -1086,6 +1373,10 @@
           <a:bodyPr/>
           <a:lstStyle/>
           <a:p>
+            <a:r>
+              <a:rPr lang="en-US" dirty="0"/>
+              <a:t/>
+            </a:r>
             <a:endParaRPr lang="en-US" dirty="0"/>
           </a:p>
         </p:txBody>
@@ -1107,7 +1398,7 @@
           <a:p>
             <a:fld id="{F7021451-1387-4CA6-816F-3879F97B5CBC}" type="slidenum">
               <a:rPr lang="en-US"/>
-              <a:t>17</a:t>
+              <a:t>18</a:t>
             </a:fld>
             <a:endParaRPr lang="en-US"/>
           </a:p>
@@ -1126,7 +1417,7 @@
 </p:notes>
 </file>
 
-<file path=ppt/notesSlides/notesSlide18.xml><?xml version="1.0" encoding="utf-8"?>
+<file path=ppt/notesSlides/notesSlide19.xml><?xml version="1.0" encoding="utf-8"?>
 <p:notes xmlns:a="http://schemas.openxmlformats.org/drawingml/2006/main" xmlns:r="http://schemas.openxmlformats.org/officeDocument/2006/relationships" xmlns:p="http://schemas.openxmlformats.org/presentationml/2006/main">
   <p:cSld>
     <p:spTree>
@@ -1170,6 +1461,10 @@
           <a:bodyPr/>
           <a:lstStyle/>
           <a:p>
+            <a:r>
+              <a:rPr lang="en-US" dirty="0"/>
+              <a:t/>
+            </a:r>
             <a:endParaRPr lang="en-US" dirty="0"/>
           </a:p>
         </p:txBody>
@@ -1191,7 +1486,7 @@
           <a:p>
             <a:fld id="{F7021451-1387-4CA6-816F-3879F97B5CBC}" type="slidenum">
               <a:rPr lang="en-US"/>
-              <a:t>18</a:t>
+              <a:t>19</a:t>
             </a:fld>
             <a:endParaRPr lang="en-US"/>
           </a:p>
@@ -1210,7 +1505,7 @@
 </p:notes>
 </file>
 
-<file path=ppt/notesSlides/notesSlide19.xml><?xml version="1.0" encoding="utf-8"?>
+<file path=ppt/notesSlides/notesSlide2.xml><?xml version="1.0" encoding="utf-8"?>
 <p:notes xmlns:a="http://schemas.openxmlformats.org/drawingml/2006/main" xmlns:r="http://schemas.openxmlformats.org/officeDocument/2006/relationships" xmlns:p="http://schemas.openxmlformats.org/presentationml/2006/main">
   <p:cSld>
     <p:spTree>
@@ -1254,6 +1549,10 @@
           <a:bodyPr/>
           <a:lstStyle/>
           <a:p>
+            <a:r>
+              <a:rPr lang="en-US" dirty="0"/>
+              <a:t/>
+            </a:r>
             <a:endParaRPr lang="en-US" dirty="0"/>
           </a:p>
         </p:txBody>
@@ -1275,7 +1574,7 @@
           <a:p>
             <a:fld id="{F7021451-1387-4CA6-816F-3879F97B5CBC}" type="slidenum">
               <a:rPr lang="en-US"/>
-              <a:t>19</a:t>
+              <a:t>2</a:t>
             </a:fld>
             <a:endParaRPr lang="en-US"/>
           </a:p>
@@ -1294,7 +1593,7 @@
 </p:notes>
 </file>
 
-<file path=ppt/notesSlides/notesSlide2.xml><?xml version="1.0" encoding="utf-8"?>
+<file path=ppt/notesSlides/notesSlide20.xml><?xml version="1.0" encoding="utf-8"?>
 <p:notes xmlns:a="http://schemas.openxmlformats.org/drawingml/2006/main" xmlns:r="http://schemas.openxmlformats.org/officeDocument/2006/relationships" xmlns:p="http://schemas.openxmlformats.org/presentationml/2006/main">
   <p:cSld>
     <p:spTree>
@@ -1338,6 +1637,10 @@
           <a:bodyPr/>
           <a:lstStyle/>
           <a:p>
+            <a:r>
+              <a:rPr lang="en-US" dirty="0"/>
+              <a:t/>
+            </a:r>
             <a:endParaRPr lang="en-US" dirty="0"/>
           </a:p>
         </p:txBody>
@@ -1359,7 +1662,7 @@
           <a:p>
             <a:fld id="{F7021451-1387-4CA6-816F-3879F97B5CBC}" type="slidenum">
               <a:rPr lang="en-US"/>
-              <a:t>2</a:t>
+              <a:t>20</a:t>
             </a:fld>
             <a:endParaRPr lang="en-US"/>
           </a:p>
@@ -1378,7 +1681,7 @@
 </p:notes>
 </file>
 
-<file path=ppt/notesSlides/notesSlide20.xml><?xml version="1.0" encoding="utf-8"?>
+<file path=ppt/notesSlides/notesSlide21.xml><?xml version="1.0" encoding="utf-8"?>
 <p:notes xmlns:a="http://schemas.openxmlformats.org/drawingml/2006/main" xmlns:r="http://schemas.openxmlformats.org/officeDocument/2006/relationships" xmlns:p="http://schemas.openxmlformats.org/presentationml/2006/main">
   <p:cSld>
     <p:spTree>
@@ -1422,6 +1725,10 @@
           <a:bodyPr/>
           <a:lstStyle/>
           <a:p>
+            <a:r>
+              <a:rPr lang="en-US" dirty="0"/>
+              <a:t/>
+            </a:r>
             <a:endParaRPr lang="en-US" dirty="0"/>
           </a:p>
         </p:txBody>
@@ -1443,7 +1750,7 @@
           <a:p>
             <a:fld id="{F7021451-1387-4CA6-816F-3879F97B5CBC}" type="slidenum">
               <a:rPr lang="en-US"/>
-              <a:t>20</a:t>
+              <a:t>21</a:t>
             </a:fld>
             <a:endParaRPr lang="en-US"/>
           </a:p>
@@ -1462,7 +1769,7 @@
 </p:notes>
 </file>
 
-<file path=ppt/notesSlides/notesSlide21.xml><?xml version="1.0" encoding="utf-8"?>
+<file path=ppt/notesSlides/notesSlide22.xml><?xml version="1.0" encoding="utf-8"?>
 <p:notes xmlns:a="http://schemas.openxmlformats.org/drawingml/2006/main" xmlns:r="http://schemas.openxmlformats.org/officeDocument/2006/relationships" xmlns:p="http://schemas.openxmlformats.org/presentationml/2006/main">
   <p:cSld>
     <p:spTree>
@@ -1506,6 +1813,10 @@
           <a:bodyPr/>
           <a:lstStyle/>
           <a:p>
+            <a:r>
+              <a:rPr lang="en-US" dirty="0"/>
+              <a:t/>
+            </a:r>
             <a:endParaRPr lang="en-US" dirty="0"/>
           </a:p>
         </p:txBody>
@@ -1527,7 +1838,7 @@
           <a:p>
             <a:fld id="{F7021451-1387-4CA6-816F-3879F97B5CBC}" type="slidenum">
               <a:rPr lang="en-US"/>
-              <a:t>21</a:t>
+              <a:t>22</a:t>
             </a:fld>
             <a:endParaRPr lang="en-US"/>
           </a:p>
@@ -1546,7 +1857,95 @@
 </p:notes>
 </file>
 
-<file path=ppt/notesSlides/notesSlide22.xml><?xml version="1.0" encoding="utf-8"?>
+<file path=ppt/notesSlides/notesSlide23.xml><?xml version="1.0" encoding="utf-8"?>
+<p:notes xmlns:a="http://schemas.openxmlformats.org/drawingml/2006/main" xmlns:r="http://schemas.openxmlformats.org/officeDocument/2006/relationships" xmlns:p="http://schemas.openxmlformats.org/presentationml/2006/main">
+  <p:cSld>
+    <p:spTree>
+      <p:nvGrpSpPr>
+        <p:cNvPr id="1" name=""/>
+        <p:cNvGrpSpPr/>
+        <p:nvPr/>
+      </p:nvGrpSpPr>
+      <p:grpSpPr>
+        <a:xfrm>
+          <a:off x="0" y="0"/>
+          <a:ext cx="0" cy="0"/>
+          <a:chOff x="0" y="0"/>
+          <a:chExt cx="0" cy="0"/>
+        </a:xfrm>
+      </p:grpSpPr>
+      <p:sp>
+        <p:nvSpPr>
+          <p:cNvPr id="2" name="Slide Image Placeholder 1"/>
+          <p:cNvSpPr>
+            <a:spLocks noGrp="1" noRot="1" noChangeAspect="1"/>
+          </p:cNvSpPr>
+          <p:nvPr>
+            <p:ph type="sldImg"/>
+          </p:nvPr>
+        </p:nvSpPr>
+        <p:spPr/>
+      </p:sp>
+      <p:sp>
+        <p:nvSpPr>
+          <p:cNvPr id="3" name="Notes Placeholder 2"/>
+          <p:cNvSpPr>
+            <a:spLocks noGrp="1"/>
+          </p:cNvSpPr>
+          <p:nvPr>
+            <p:ph type="body" idx="1"/>
+          </p:nvPr>
+        </p:nvSpPr>
+        <p:spPr/>
+        <p:txBody>
+          <a:bodyPr/>
+          <a:lstStyle/>
+          <a:p>
+            <a:r>
+              <a:rPr lang="en-US" dirty="0"/>
+              <a:t/>
+            </a:r>
+            <a:endParaRPr lang="en-US" dirty="0"/>
+          </a:p>
+        </p:txBody>
+      </p:sp>
+      <p:sp>
+        <p:nvSpPr>
+          <p:cNvPr id="4" name="Slide Number Placeholder 3"/>
+          <p:cNvSpPr>
+            <a:spLocks noGrp="1"/>
+          </p:cNvSpPr>
+          <p:nvPr>
+            <p:ph type="sldNum" sz="quarter" idx="10"/>
+          </p:nvPr>
+        </p:nvSpPr>
+        <p:spPr/>
+        <p:txBody>
+          <a:bodyPr/>
+          <a:lstStyle/>
+          <a:p>
+            <a:fld id="{F7021451-1387-4CA6-816F-3879F97B5CBC}" type="slidenum">
+              <a:rPr lang="en-US"/>
+              <a:t>23</a:t>
+            </a:fld>
+            <a:endParaRPr lang="en-US"/>
+          </a:p>
+        </p:txBody>
+      </p:sp>
+    </p:spTree>
+    <p:extLst>
+      <p:ext uri="{BB962C8B-B14F-4D97-AF65-F5344CB8AC3E}">
+        <p14:creationId xmlns:p14="http://schemas.microsoft.com/office/powerpoint/2010/main" val="1024086991"/>
+      </p:ext>
+    </p:extLst>
+  </p:cSld>
+  <p:clrMapOvr>
+    <a:masterClrMapping/>
+  </p:clrMapOvr>
+</p:notes>
+</file>
+
+<file path=ppt/notesSlides/notesSlide24.xml><?xml version="1.0" encoding="utf-8"?>
 <p:notes xmlns:a="http://schemas.openxmlformats.org/drawingml/2006/main" xmlns:r="http://schemas.openxmlformats.org/officeDocument/2006/relationships" xmlns:p="http://schemas.openxmlformats.org/presentationml/2006/main">
   <p:cSld>
     <p:spTree>
@@ -1613,6 +2012,7 @@
  Speaker Notes
 To wrap up: Our results paint a more nuanced picture of how children perceive ethnic diversity. The classic Outgroup Homogeneity Effect and Minority-Groups Homogeneity Effect didn't emerge as predicted. Instead, children's perceptions are guided by the actual visual features of faces and organized according to face-space principles. Importantly, we see developmental changes—older children distinguish between groups more finely. Of course, our work has limitations: we haven't directly measured threat perception or cultural factors that might moderate these effects. But looking forward, this research opens new doors. Understanding the perceptual foundations of social categorization could inform school-based interventions that leverage face-space similarity principles. By helping children develop more individuated, less stereotypical representations of outgroup members—what researchers call "personalization"—we might reduce intergroup bias from the ground up. Thank you.</a:t>
             </a:r>
+            <a:endParaRPr lang="en-US" dirty="0"/>
           </a:p>
         </p:txBody>
       </p:sp>
@@ -1633,7 +2033,7 @@
           <a:p>
             <a:fld id="{F7021451-1387-4CA6-816F-3879F97B5CBC}" type="slidenum">
               <a:rPr lang="en-US"/>
-              <a:t>22</a:t>
+              <a:t>24</a:t>
             </a:fld>
             <a:endParaRPr lang="en-US"/>
           </a:p>
@@ -1652,7 +2052,7 @@
 </p:notes>
 </file>
 
-<file path=ppt/notesSlides/notesSlide23.xml><?xml version="1.0" encoding="utf-8"?>
+<file path=ppt/notesSlides/notesSlide25.xml><?xml version="1.0" encoding="utf-8"?>
 <p:notes xmlns:a="http://schemas.openxmlformats.org/drawingml/2006/main" xmlns:r="http://schemas.openxmlformats.org/officeDocument/2006/relationships" xmlns:p="http://schemas.openxmlformats.org/presentationml/2006/main">
   <p:cSld>
     <p:spTree>
@@ -1696,6 +2096,10 @@
           <a:bodyPr/>
           <a:lstStyle/>
           <a:p>
+            <a:r>
+              <a:rPr lang="en-US" dirty="0"/>
+              <a:t/>
+            </a:r>
             <a:endParaRPr lang="en-US" dirty="0"/>
           </a:p>
         </p:txBody>
@@ -1717,7 +2121,7 @@
           <a:p>
             <a:fld id="{F7021451-1387-4CA6-816F-3879F97B5CBC}" type="slidenum">
               <a:rPr lang="en-US"/>
-              <a:t>23</a:t>
+              <a:t>25</a:t>
             </a:fld>
             <a:endParaRPr lang="en-US"/>
           </a:p>
@@ -1736,7 +2140,7 @@
 </p:notes>
 </file>
 
-<file path=ppt/notesSlides/notesSlide24.xml><?xml version="1.0" encoding="utf-8"?>
+<file path=ppt/notesSlides/notesSlide26.xml><?xml version="1.0" encoding="utf-8"?>
 <p:notes xmlns:a="http://schemas.openxmlformats.org/drawingml/2006/main" xmlns:r="http://schemas.openxmlformats.org/officeDocument/2006/relationships" xmlns:p="http://schemas.openxmlformats.org/presentationml/2006/main">
   <p:cSld>
     <p:spTree>
@@ -1780,6 +2184,10 @@
           <a:bodyPr/>
           <a:lstStyle/>
           <a:p>
+            <a:r>
+              <a:rPr lang="en-US" dirty="0"/>
+              <a:t/>
+            </a:r>
             <a:endParaRPr lang="en-US" dirty="0"/>
           </a:p>
         </p:txBody>
@@ -1801,7 +2209,7 @@
           <a:p>
             <a:fld id="{F7021451-1387-4CA6-816F-3879F97B5CBC}" type="slidenum">
               <a:rPr lang="en-US"/>
-              <a:t>24</a:t>
+              <a:t>26</a:t>
             </a:fld>
             <a:endParaRPr lang="en-US"/>
           </a:p>
@@ -1820,7 +2228,7 @@
 </p:notes>
 </file>
 
-<file path=ppt/notesSlides/notesSlide25.xml><?xml version="1.0" encoding="utf-8"?>
+<file path=ppt/notesSlides/notesSlide27.xml><?xml version="1.0" encoding="utf-8"?>
 <p:notes xmlns:a="http://schemas.openxmlformats.org/drawingml/2006/main" xmlns:r="http://schemas.openxmlformats.org/officeDocument/2006/relationships" xmlns:p="http://schemas.openxmlformats.org/presentationml/2006/main">
   <p:cSld>
     <p:spTree>
@@ -1864,6 +2272,10 @@
           <a:bodyPr/>
           <a:lstStyle/>
           <a:p>
+            <a:r>
+              <a:rPr lang="en-US" dirty="0"/>
+              <a:t/>
+            </a:r>
             <a:endParaRPr lang="en-US" dirty="0"/>
           </a:p>
         </p:txBody>
@@ -1885,7 +2297,7 @@
           <a:p>
             <a:fld id="{F7021451-1387-4CA6-816F-3879F97B5CBC}" type="slidenum">
               <a:rPr lang="en-US"/>
-              <a:t>25</a:t>
+              <a:t>27</a:t>
             </a:fld>
             <a:endParaRPr lang="en-US"/>
           </a:p>
@@ -1948,6 +2360,10 @@
           <a:bodyPr/>
           <a:lstStyle/>
           <a:p>
+            <a:r>
+              <a:rPr lang="en-US" dirty="0"/>
+              <a:t/>
+            </a:r>
             <a:endParaRPr lang="en-US" dirty="0"/>
           </a:p>
         </p:txBody>
@@ -2032,6 +2448,10 @@
           <a:bodyPr/>
           <a:lstStyle/>
           <a:p>
+            <a:r>
+              <a:rPr lang="en-US" dirty="0"/>
+              <a:t/>
+            </a:r>
             <a:endParaRPr lang="en-US" dirty="0"/>
           </a:p>
         </p:txBody>
@@ -2116,6 +2536,11 @@
           <a:bodyPr/>
           <a:lstStyle/>
           <a:p>
+            <a:r>
+              <a:rPr lang="en-US" dirty="0"/>
+              <a:t>Speaker Notes
+Decades of research show that infants display early visual specialization for ingroup faces, leading to the Perceptual-Social Linkage hypothesis. Yet, when we look at childhood, specifically ages 3 to 8, the evidence for the Outgroup Homogeneity Effect becomes inconsistent. We hypothesize that traditional tasks force children into rigid, explicit categories and may not capture how they spontaneously perceive social groups.</a:t>
+            </a:r>
             <a:endParaRPr lang="en-US" dirty="0"/>
           </a:p>
         </p:txBody>
@@ -2200,6 +2625,10 @@
           <a:bodyPr/>
           <a:lstStyle/>
           <a:p>
+            <a:r>
+              <a:rPr lang="en-US" dirty="0"/>
+              <a:t/>
+            </a:r>
             <a:endParaRPr lang="en-US" dirty="0"/>
           </a:p>
         </p:txBody>
@@ -2284,6 +2713,10 @@
           <a:bodyPr/>
           <a:lstStyle/>
           <a:p>
+            <a:r>
+              <a:rPr lang="en-US" dirty="0"/>
+              <a:t/>
+            </a:r>
             <a:endParaRPr lang="en-US" dirty="0"/>
           </a:p>
         </p:txBody>
@@ -2368,6 +2801,10 @@
           <a:bodyPr/>
           <a:lstStyle/>
           <a:p>
+            <a:r>
+              <a:rPr lang="en-US" dirty="0"/>
+              <a:t/>
+            </a:r>
             <a:endParaRPr lang="en-US" dirty="0"/>
           </a:p>
         </p:txBody>
@@ -2452,6 +2889,10 @@
           <a:bodyPr/>
           <a:lstStyle/>
           <a:p>
+            <a:r>
+              <a:rPr lang="en-US" dirty="0"/>
+              <a:t/>
+            </a:r>
             <a:endParaRPr lang="en-US" dirty="0"/>
           </a:p>
         </p:txBody>
@@ -2525,11 +2966,6 @@
 <file path=ppt/slideMasters/slideMaster1.xml><?xml version="1.0" encoding="utf-8"?>
 <p:sldMaster xmlns:a="http://schemas.openxmlformats.org/drawingml/2006/main" xmlns:r="http://schemas.openxmlformats.org/officeDocument/2006/relationships" xmlns:p="http://schemas.openxmlformats.org/presentationml/2006/main">
   <p:cSld>
-    <p:bg>
-      <p:bgRef idx="1001">
-        <a:schemeClr val="bg1"/>
-      </p:bgRef>
-    </p:bg>
     <p:spTree>
       <p:nvGrpSpPr>
         <p:cNvPr id="1" name=""/>
@@ -2810,7 +3246,7 @@
     <p:bg>
       <p:bgPr>
         <a:blipFill dpi="0" rotWithShape="1">
-          <a:blip r:embed="rId3">
+          <a:blip r:embed="rId1">
             <a:lum/>
           </a:blip>
           <a:srcRect/>
@@ -2849,7 +3285,7 @@
     <p:bg>
       <p:bgPr>
         <a:blipFill dpi="0" rotWithShape="1">
-          <a:blip r:embed="rId3">
+          <a:blip r:embed="rId1">
             <a:lum/>
           </a:blip>
           <a:srcRect/>
@@ -2888,7 +3324,7 @@
     <p:bg>
       <p:bgPr>
         <a:blipFill dpi="0" rotWithShape="1">
-          <a:blip r:embed="rId3">
+          <a:blip r:embed="rId1">
             <a:lum/>
           </a:blip>
           <a:srcRect/>
@@ -2927,7 +3363,7 @@
     <p:bg>
       <p:bgPr>
         <a:blipFill dpi="0" rotWithShape="1">
-          <a:blip r:embed="rId3">
+          <a:blip r:embed="rId1">
             <a:lum/>
           </a:blip>
           <a:srcRect/>
@@ -2966,7 +3402,7 @@
     <p:bg>
       <p:bgPr>
         <a:blipFill dpi="0" rotWithShape="1">
-          <a:blip r:embed="rId3">
+          <a:blip r:embed="rId1">
             <a:lum/>
           </a:blip>
           <a:srcRect/>
@@ -3005,7 +3441,7 @@
     <p:bg>
       <p:bgPr>
         <a:blipFill dpi="0" rotWithShape="1">
-          <a:blip r:embed="rId3">
+          <a:blip r:embed="rId1">
             <a:lum/>
           </a:blip>
           <a:srcRect/>
@@ -3044,7 +3480,7 @@
     <p:bg>
       <p:bgPr>
         <a:blipFill dpi="0" rotWithShape="1">
-          <a:blip r:embed="rId3">
+          <a:blip r:embed="rId1">
             <a:lum/>
           </a:blip>
           <a:srcRect/>
@@ -3083,7 +3519,7 @@
     <p:bg>
       <p:bgPr>
         <a:blipFill dpi="0" rotWithShape="1">
-          <a:blip r:embed="rId3">
+          <a:blip r:embed="rId1">
             <a:lum/>
           </a:blip>
           <a:srcRect/>
@@ -3122,7 +3558,7 @@
     <p:bg>
       <p:bgPr>
         <a:blipFill dpi="0" rotWithShape="1">
-          <a:blip r:embed="rId3">
+          <a:blip r:embed="rId1">
             <a:lum/>
           </a:blip>
           <a:srcRect/>
@@ -3161,7 +3597,7 @@
     <p:bg>
       <p:bgPr>
         <a:blipFill dpi="0" rotWithShape="1">
-          <a:blip r:embed="rId3">
+          <a:blip r:embed="rId1">
             <a:lum/>
           </a:blip>
           <a:srcRect/>
@@ -3200,7 +3636,7 @@
     <p:bg>
       <p:bgPr>
         <a:blipFill dpi="0" rotWithShape="1">
-          <a:blip r:embed="rId3">
+          <a:blip r:embed="rId1">
             <a:lum/>
           </a:blip>
           <a:srcRect/>
@@ -3239,7 +3675,7 @@
     <p:bg>
       <p:bgPr>
         <a:blipFill dpi="0" rotWithShape="1">
-          <a:blip r:embed="rId3">
+          <a:blip r:embed="rId1">
             <a:lum/>
           </a:blip>
           <a:srcRect/>
@@ -3278,7 +3714,7 @@
     <p:bg>
       <p:bgPr>
         <a:blipFill dpi="0" rotWithShape="1">
-          <a:blip r:embed="rId3">
+          <a:blip r:embed="rId1">
             <a:lum/>
           </a:blip>
           <a:srcRect/>
@@ -3317,7 +3753,7 @@
     <p:bg>
       <p:bgPr>
         <a:blipFill dpi="0" rotWithShape="1">
-          <a:blip r:embed="rId3">
+          <a:blip r:embed="rId1">
             <a:lum/>
           </a:blip>
           <a:srcRect/>
@@ -3356,7 +3792,7 @@
     <p:bg>
       <p:bgPr>
         <a:blipFill dpi="0" rotWithShape="1">
-          <a:blip r:embed="rId3">
+          <a:blip r:embed="rId1">
             <a:lum/>
           </a:blip>
           <a:srcRect/>
@@ -3395,7 +3831,7 @@
     <p:bg>
       <p:bgPr>
         <a:blipFill dpi="0" rotWithShape="1">
-          <a:blip r:embed="rId3">
+          <a:blip r:embed="rId1">
             <a:lum/>
           </a:blip>
           <a:srcRect/>
@@ -3434,7 +3870,7 @@
     <p:bg>
       <p:bgPr>
         <a:blipFill dpi="0" rotWithShape="1">
-          <a:blip r:embed="rId3">
+          <a:blip r:embed="rId1">
             <a:lum/>
           </a:blip>
           <a:srcRect/>
@@ -3473,7 +3909,7 @@
     <p:bg>
       <p:bgPr>
         <a:blipFill dpi="0" rotWithShape="1">
-          <a:blip r:embed="rId3">
+          <a:blip r:embed="rId1">
             <a:lum/>
           </a:blip>
           <a:srcRect/>
@@ -3506,13 +3942,13 @@
 </p:sld>
 </file>
 
-<file path=ppt/slides/slide3.xml><?xml version="1.0" encoding="utf-8"?>
+<file path=ppt/slides/slide26.xml><?xml version="1.0" encoding="utf-8"?>
 <p:sld xmlns:a="http://schemas.openxmlformats.org/drawingml/2006/main" xmlns:r="http://schemas.openxmlformats.org/officeDocument/2006/relationships" xmlns:p="http://schemas.openxmlformats.org/presentationml/2006/main">
-  <p:cSld name="Slide 3">
+  <p:cSld name="Slide 26">
     <p:bg>
       <p:bgPr>
         <a:blipFill dpi="0" rotWithShape="1">
-          <a:blip r:embed="rId3">
+          <a:blip r:embed="rId1">
             <a:lum/>
           </a:blip>
           <a:srcRect/>
@@ -3545,13 +3981,13 @@
 </p:sld>
 </file>
 
-<file path=ppt/slides/slide4.xml><?xml version="1.0" encoding="utf-8"?>
+<file path=ppt/slides/slide27.xml><?xml version="1.0" encoding="utf-8"?>
 <p:sld xmlns:a="http://schemas.openxmlformats.org/drawingml/2006/main" xmlns:r="http://schemas.openxmlformats.org/officeDocument/2006/relationships" xmlns:p="http://schemas.openxmlformats.org/presentationml/2006/main">
-  <p:cSld name="Slide 4">
+  <p:cSld name="Slide 27">
     <p:bg>
       <p:bgPr>
         <a:blipFill dpi="0" rotWithShape="1">
-          <a:blip r:embed="rId3">
+          <a:blip r:embed="rId1">
             <a:lum/>
           </a:blip>
           <a:srcRect/>
@@ -3584,13 +4020,13 @@
 </p:sld>
 </file>
 
-<file path=ppt/slides/slide5.xml><?xml version="1.0" encoding="utf-8"?>
+<file path=ppt/slides/slide3.xml><?xml version="1.0" encoding="utf-8"?>
 <p:sld xmlns:a="http://schemas.openxmlformats.org/drawingml/2006/main" xmlns:r="http://schemas.openxmlformats.org/officeDocument/2006/relationships" xmlns:p="http://schemas.openxmlformats.org/presentationml/2006/main">
-  <p:cSld name="Slide 5">
+  <p:cSld name="Slide 3">
     <p:bg>
       <p:bgPr>
         <a:blipFill dpi="0" rotWithShape="1">
-          <a:blip r:embed="rId3">
+          <a:blip r:embed="rId1">
             <a:lum/>
           </a:blip>
           <a:srcRect/>
@@ -3623,13 +4059,13 @@
 </p:sld>
 </file>
 
-<file path=ppt/slides/slide6.xml><?xml version="1.0" encoding="utf-8"?>
+<file path=ppt/slides/slide4.xml><?xml version="1.0" encoding="utf-8"?>
 <p:sld xmlns:a="http://schemas.openxmlformats.org/drawingml/2006/main" xmlns:r="http://schemas.openxmlformats.org/officeDocument/2006/relationships" xmlns:p="http://schemas.openxmlformats.org/presentationml/2006/main">
-  <p:cSld name="Slide 6">
+  <p:cSld name="Slide 4">
     <p:bg>
       <p:bgPr>
         <a:blipFill dpi="0" rotWithShape="1">
-          <a:blip r:embed="rId3">
+          <a:blip r:embed="rId1">
             <a:lum/>
           </a:blip>
           <a:srcRect/>
@@ -3662,13 +4098,13 @@
 </p:sld>
 </file>
 
-<file path=ppt/slides/slide7.xml><?xml version="1.0" encoding="utf-8"?>
+<file path=ppt/slides/slide5.xml><?xml version="1.0" encoding="utf-8"?>
 <p:sld xmlns:a="http://schemas.openxmlformats.org/drawingml/2006/main" xmlns:r="http://schemas.openxmlformats.org/officeDocument/2006/relationships" xmlns:p="http://schemas.openxmlformats.org/presentationml/2006/main">
-  <p:cSld name="Slide 7">
+  <p:cSld name="Slide 5">
     <p:bg>
       <p:bgPr>
         <a:blipFill dpi="0" rotWithShape="1">
-          <a:blip r:embed="rId3">
+          <a:blip r:embed="rId1">
             <a:lum/>
           </a:blip>
           <a:srcRect/>
@@ -3701,13 +4137,13 @@
 </p:sld>
 </file>
 
-<file path=ppt/slides/slide8.xml><?xml version="1.0" encoding="utf-8"?>
+<file path=ppt/slides/slide6.xml><?xml version="1.0" encoding="utf-8"?>
 <p:sld xmlns:a="http://schemas.openxmlformats.org/drawingml/2006/main" xmlns:r="http://schemas.openxmlformats.org/officeDocument/2006/relationships" xmlns:p="http://schemas.openxmlformats.org/presentationml/2006/main">
-  <p:cSld name="Slide 8">
+  <p:cSld name="Slide 6">
     <p:bg>
       <p:bgPr>
         <a:blipFill dpi="0" rotWithShape="1">
-          <a:blip r:embed="rId3">
+          <a:blip r:embed="rId1">
             <a:lum/>
           </a:blip>
           <a:srcRect/>
@@ -3740,13 +4176,91 @@
 </p:sld>
 </file>
 
+<file path=ppt/slides/slide7.xml><?xml version="1.0" encoding="utf-8"?>
+<p:sld xmlns:a="http://schemas.openxmlformats.org/drawingml/2006/main" xmlns:r="http://schemas.openxmlformats.org/officeDocument/2006/relationships" xmlns:p="http://schemas.openxmlformats.org/presentationml/2006/main">
+  <p:cSld name="Slide 7">
+    <p:bg>
+      <p:bgPr>
+        <a:blipFill dpi="0" rotWithShape="1">
+          <a:blip r:embed="rId1">
+            <a:lum/>
+          </a:blip>
+          <a:srcRect/>
+          <a:stretch>
+            <a:fillRect/>
+          </a:stretch>
+        </a:blipFill>
+        <a:effectLst/>
+      </p:bgPr>
+    </p:bg>
+    <p:spTree>
+      <p:nvGrpSpPr>
+        <p:cNvPr id="1" name=""/>
+        <p:cNvGrpSpPr/>
+        <p:nvPr/>
+      </p:nvGrpSpPr>
+      <p:grpSpPr>
+        <a:xfrm>
+          <a:off x="0" y="0"/>
+          <a:ext cx="0" cy="0"/>
+          <a:chOff x="0" y="0"/>
+          <a:chExt cx="0" cy="0"/>
+        </a:xfrm>
+      </p:grpSpPr>
+    </p:spTree>
+  </p:cSld>
+  <p:clrMapOvr>
+    <a:masterClrMapping/>
+  </p:clrMapOvr>
+</p:sld>
+</file>
+
+<file path=ppt/slides/slide8.xml><?xml version="1.0" encoding="utf-8"?>
+<p:sld xmlns:a="http://schemas.openxmlformats.org/drawingml/2006/main" xmlns:r="http://schemas.openxmlformats.org/officeDocument/2006/relationships" xmlns:p="http://schemas.openxmlformats.org/presentationml/2006/main">
+  <p:cSld name="Slide 8">
+    <p:bg>
+      <p:bgPr>
+        <a:blipFill dpi="0" rotWithShape="1">
+          <a:blip r:embed="rId1">
+            <a:lum/>
+          </a:blip>
+          <a:srcRect/>
+          <a:stretch>
+            <a:fillRect/>
+          </a:stretch>
+        </a:blipFill>
+        <a:effectLst/>
+      </p:bgPr>
+    </p:bg>
+    <p:spTree>
+      <p:nvGrpSpPr>
+        <p:cNvPr id="1" name=""/>
+        <p:cNvGrpSpPr/>
+        <p:nvPr/>
+      </p:nvGrpSpPr>
+      <p:grpSpPr>
+        <a:xfrm>
+          <a:off x="0" y="0"/>
+          <a:ext cx="0" cy="0"/>
+          <a:chOff x="0" y="0"/>
+          <a:chExt cx="0" cy="0"/>
+        </a:xfrm>
+      </p:grpSpPr>
+    </p:spTree>
+  </p:cSld>
+  <p:clrMapOvr>
+    <a:masterClrMapping/>
+  </p:clrMapOvr>
+</p:sld>
+</file>
+
 <file path=ppt/slides/slide9.xml><?xml version="1.0" encoding="utf-8"?>
 <p:sld xmlns:a="http://schemas.openxmlformats.org/drawingml/2006/main" xmlns:r="http://schemas.openxmlformats.org/officeDocument/2006/relationships" xmlns:p="http://schemas.openxmlformats.org/presentationml/2006/main">
   <p:cSld name="Slide 9">
     <p:bg>
       <p:bgPr>
         <a:blipFill dpi="0" rotWithShape="1">
-          <a:blip r:embed="rId3">
+          <a:blip r:embed="rId1">
             <a:lum/>
           </a:blip>
           <a:srcRect/>
@@ -4072,319 +4586,4 @@
     </a:ext>
   </a:extLst>
 </a:theme>
-</file>
-
-<file path=ppt/theme/theme2.xml><?xml version="1.0" encoding="utf-8"?>
-<a:theme xmlns:a="http://schemas.openxmlformats.org/drawingml/2006/main" name="Tema di Office">
-  <a:themeElements>
-    <a:clrScheme name="Office">
-      <a:dk1>
-        <a:sysClr val="windowText" lastClr="000000"/>
-      </a:dk1>
-      <a:lt1>
-        <a:sysClr val="window" lastClr="FFFFFF"/>
-      </a:lt1>
-      <a:dk2>
-        <a:srgbClr val="0E2841"/>
-      </a:dk2>
-      <a:lt2>
-        <a:srgbClr val="E8E8E8"/>
-      </a:lt2>
-      <a:accent1>
-        <a:srgbClr val="156082"/>
-      </a:accent1>
-      <a:accent2>
-        <a:srgbClr val="E97132"/>
-      </a:accent2>
-      <a:accent3>
-        <a:srgbClr val="196B24"/>
-      </a:accent3>
-      <a:accent4>
-        <a:srgbClr val="0F9ED5"/>
-      </a:accent4>
-      <a:accent5>
-        <a:srgbClr val="A02B93"/>
-      </a:accent5>
-      <a:accent6>
-        <a:srgbClr val="4EA72E"/>
-      </a:accent6>
-      <a:hlink>
-        <a:srgbClr val="467886"/>
-      </a:hlink>
-      <a:folHlink>
-        <a:srgbClr val="96607D"/>
-      </a:folHlink>
-    </a:clrScheme>
-    <a:fontScheme name="Office">
-      <a:majorFont>
-        <a:latin typeface="Aptos Display" panose="02110004020202020204"/>
-        <a:ea typeface=""/>
-        <a:cs typeface=""/>
-        <a:font script="Jpan" typeface="游ゴシック Light"/>
-        <a:font script="Hang" typeface="맑은 고딕"/>
-        <a:font script="Hans" typeface="等线 Light"/>
-        <a:font script="Hant" typeface="新細明體"/>
-        <a:font script="Arab" typeface="Times New Roman"/>
-        <a:font script="Hebr" typeface="Times New Roman"/>
-        <a:font script="Thai" typeface="Angsana New"/>
-        <a:font script="Ethi" typeface="Nyala"/>
-        <a:font script="Beng" typeface="Vrinda"/>
-        <a:font script="Gujr" typeface="Shruti"/>
-        <a:font script="Khmr" typeface="MoolBoran"/>
-        <a:font script="Knda" typeface="Tunga"/>
-        <a:font script="Guru" typeface="Raavi"/>
-        <a:font script="Cans" typeface="Euphemia"/>
-        <a:font script="Cher" typeface="Plantagenet Cherokee"/>
-        <a:font script="Yiii" typeface="Microsoft Yi Baiti"/>
-        <a:font script="Tibt" typeface="Microsoft Himalaya"/>
-        <a:font script="Thaa" typeface="MV Boli"/>
-        <a:font script="Deva" typeface="Mangal"/>
-        <a:font script="Telu" typeface="Gautami"/>
-        <a:font script="Taml" typeface="Latha"/>
-        <a:font script="Syrc" typeface="Estrangelo Edessa"/>
-        <a:font script="Orya" typeface="Kalinga"/>
-        <a:font script="Mlym" typeface="Kartika"/>
-        <a:font script="Laoo" typeface="DokChampa"/>
-        <a:font script="Sinh" typeface="Iskoola Pota"/>
-        <a:font script="Mong" typeface="Mongolian Baiti"/>
-        <a:font script="Viet" typeface="Times New Roman"/>
-        <a:font script="Uigh" typeface="Microsoft Uighur"/>
-        <a:font script="Geor" typeface="Sylfaen"/>
-        <a:font script="Armn" typeface="Arial"/>
-        <a:font script="Bugi" typeface="Leelawadee UI"/>
-        <a:font script="Bopo" typeface="Microsoft JhengHei"/>
-        <a:font script="Java" typeface="Javanese Text"/>
-        <a:font script="Lisu" typeface="Segoe UI"/>
-        <a:font script="Mymr" typeface="Myanmar Text"/>
-        <a:font script="Nkoo" typeface="Ebrima"/>
-        <a:font script="Olck" typeface="Nirmala UI"/>
-        <a:font script="Osma" typeface="Ebrima"/>
-        <a:font script="Phag" typeface="Phagspa"/>
-        <a:font script="Syrn" typeface="Estrangelo Edessa"/>
-        <a:font script="Syrj" typeface="Estrangelo Edessa"/>
-        <a:font script="Syre" typeface="Estrangelo Edessa"/>
-        <a:font script="Sora" typeface="Nirmala UI"/>
-        <a:font script="Tale" typeface="Microsoft Tai Le"/>
-        <a:font script="Talu" typeface="Microsoft New Tai Lue"/>
-        <a:font script="Tfng" typeface="Ebrima"/>
-      </a:majorFont>
-      <a:minorFont>
-        <a:latin typeface="Aptos" panose="02110004020202020204"/>
-        <a:ea typeface=""/>
-        <a:cs typeface=""/>
-        <a:font script="Jpan" typeface="游ゴシック"/>
-        <a:font script="Hang" typeface="맑은 고딕"/>
-        <a:font script="Hans" typeface="等线"/>
-        <a:font script="Hant" typeface="新細明體"/>
-        <a:font script="Arab" typeface="Arial"/>
-        <a:font script="Hebr" typeface="Arial"/>
-        <a:font script="Thai" typeface="Cordia New"/>
-        <a:font script="Ethi" typeface="Nyala"/>
-        <a:font script="Beng" typeface="Vrinda"/>
-        <a:font script="Gujr" typeface="Shruti"/>
-        <a:font script="Khmr" typeface="DaunPenh"/>
-        <a:font script="Knda" typeface="Tunga"/>
-        <a:font script="Guru" typeface="Raavi"/>
-        <a:font script="Cans" typeface="Euphemia"/>
-        <a:font script="Cher" typeface="Plantagenet Cherokee"/>
-        <a:font script="Yiii" typeface="Microsoft Yi Baiti"/>
-        <a:font script="Tibt" typeface="Microsoft Himalaya"/>
-        <a:font script="Thaa" typeface="MV Boli"/>
-        <a:font script="Deva" typeface="Mangal"/>
-        <a:font script="Telu" typeface="Gautami"/>
-        <a:font script="Taml" typeface="Latha"/>
-        <a:font script="Syrc" typeface="Estrangelo Edessa"/>
-        <a:font script="Orya" typeface="Kalinga"/>
-        <a:font script="Mlym" typeface="Kartika"/>
-        <a:font script="Laoo" typeface="DokChampa"/>
-        <a:font script="Sinh" typeface="Iskoola Pota"/>
-        <a:font script="Mong" typeface="Mongolian Baiti"/>
-        <a:font script="Viet" typeface="Arial"/>
-        <a:font script="Uigh" typeface="Microsoft Uighur"/>
-        <a:font script="Geor" typeface="Sylfaen"/>
-        <a:font script="Armn" typeface="Arial"/>
-        <a:font script="Bugi" typeface="Leelawadee UI"/>
-        <a:font script="Bopo" typeface="Microsoft JhengHei"/>
-        <a:font script="Java" typeface="Javanese Text"/>
-        <a:font script="Lisu" typeface="Segoe UI"/>
-        <a:font script="Mymr" typeface="Myanmar Text"/>
-        <a:font script="Nkoo" typeface="Ebrima"/>
-        <a:font script="Olck" typeface="Nirmala UI"/>
-        <a:font script="Osma" typeface="Ebrima"/>
-        <a:font script="Phag" typeface="Phagspa"/>
-        <a:font script="Syrn" typeface="Estrangelo Edessa"/>
-        <a:font script="Syrj" typeface="Estrangelo Edessa"/>
-        <a:font script="Syre" typeface="Estrangelo Edessa"/>
-        <a:font script="Sora" typeface="Nirmala UI"/>
-        <a:font script="Tale" typeface="Microsoft Tai Le"/>
-        <a:font script="Talu" typeface="Microsoft New Tai Lue"/>
-        <a:font script="Tfng" typeface="Ebrima"/>
-      </a:minorFont>
-    </a:fontScheme>
-    <a:fmtScheme name="Office">
-      <a:fillStyleLst>
-        <a:solidFill>
-          <a:schemeClr val="phClr"/>
-        </a:solidFill>
-        <a:gradFill rotWithShape="1">
-          <a:gsLst>
-            <a:gs pos="0">
-              <a:schemeClr val="phClr">
-                <a:lumMod val="110000"/>
-                <a:satMod val="105000"/>
-                <a:tint val="67000"/>
-              </a:schemeClr>
-            </a:gs>
-            <a:gs pos="50000">
-              <a:schemeClr val="phClr">
-                <a:lumMod val="105000"/>
-                <a:satMod val="103000"/>
-                <a:tint val="73000"/>
-              </a:schemeClr>
-            </a:gs>
-            <a:gs pos="100000">
-              <a:schemeClr val="phClr">
-                <a:lumMod val="105000"/>
-                <a:satMod val="109000"/>
-                <a:tint val="81000"/>
-              </a:schemeClr>
-            </a:gs>
-          </a:gsLst>
-          <a:lin ang="5400000" scaled="0"/>
-        </a:gradFill>
-        <a:gradFill rotWithShape="1">
-          <a:gsLst>
-            <a:gs pos="0">
-              <a:schemeClr val="phClr">
-                <a:satMod val="103000"/>
-                <a:lumMod val="102000"/>
-                <a:tint val="94000"/>
-              </a:schemeClr>
-            </a:gs>
-            <a:gs pos="50000">
-              <a:schemeClr val="phClr">
-                <a:satMod val="110000"/>
-                <a:lumMod val="100000"/>
-                <a:shade val="100000"/>
-              </a:schemeClr>
-            </a:gs>
-            <a:gs pos="100000">
-              <a:schemeClr val="phClr">
-                <a:lumMod val="99000"/>
-                <a:satMod val="120000"/>
-                <a:shade val="78000"/>
-              </a:schemeClr>
-            </a:gs>
-          </a:gsLst>
-          <a:lin ang="5400000" scaled="0"/>
-        </a:gradFill>
-      </a:fillStyleLst>
-      <a:lnStyleLst>
-        <a:ln w="12700" cap="flat" cmpd="sng" algn="ctr">
-          <a:solidFill>
-            <a:schemeClr val="phClr"/>
-          </a:solidFill>
-          <a:prstDash val="solid"/>
-          <a:miter lim="800000"/>
-        </a:ln>
-        <a:ln w="19050" cap="flat" cmpd="sng" algn="ctr">
-          <a:solidFill>
-            <a:schemeClr val="phClr"/>
-          </a:solidFill>
-          <a:prstDash val="solid"/>
-          <a:miter lim="800000"/>
-        </a:ln>
-        <a:ln w="25400" cap="flat" cmpd="sng" algn="ctr">
-          <a:solidFill>
-            <a:schemeClr val="phClr"/>
-          </a:solidFill>
-          <a:prstDash val="solid"/>
-          <a:miter lim="800000"/>
-        </a:ln>
-      </a:lnStyleLst>
-      <a:effectStyleLst>
-        <a:effectStyle>
-          <a:effectLst/>
-        </a:effectStyle>
-        <a:effectStyle>
-          <a:effectLst/>
-        </a:effectStyle>
-        <a:effectStyle>
-          <a:effectLst>
-            <a:outerShdw blurRad="57150" dist="19050" dir="5400000" algn="ctr" rotWithShape="0">
-              <a:srgbClr val="000000">
-                <a:alpha val="63000"/>
-              </a:srgbClr>
-            </a:outerShdw>
-          </a:effectLst>
-        </a:effectStyle>
-      </a:effectStyleLst>
-      <a:bgFillStyleLst>
-        <a:solidFill>
-          <a:schemeClr val="phClr"/>
-        </a:solidFill>
-        <a:solidFill>
-          <a:schemeClr val="phClr">
-            <a:tint val="95000"/>
-            <a:satMod val="170000"/>
-          </a:schemeClr>
-        </a:solidFill>
-        <a:gradFill rotWithShape="1">
-          <a:gsLst>
-            <a:gs pos="0">
-              <a:schemeClr val="phClr">
-                <a:tint val="93000"/>
-                <a:satMod val="150000"/>
-                <a:shade val="98000"/>
-                <a:lumMod val="102000"/>
-              </a:schemeClr>
-            </a:gs>
-            <a:gs pos="50000">
-              <a:schemeClr val="phClr">
-                <a:tint val="98000"/>
-                <a:satMod val="130000"/>
-                <a:shade val="90000"/>
-                <a:lumMod val="103000"/>
-              </a:schemeClr>
-            </a:gs>
-            <a:gs pos="100000">
-              <a:schemeClr val="phClr">
-                <a:shade val="63000"/>
-                <a:satMod val="120000"/>
-              </a:schemeClr>
-            </a:gs>
-          </a:gsLst>
-          <a:lin ang="5400000" scaled="0"/>
-        </a:gradFill>
-      </a:bgFillStyleLst>
-    </a:fmtScheme>
-  </a:themeElements>
-  <a:objectDefaults>
-    <a:lnDef>
-      <a:spPr/>
-      <a:bodyPr/>
-      <a:lstStyle/>
-      <a:style>
-        <a:lnRef idx="2">
-          <a:schemeClr val="accent1"/>
-        </a:lnRef>
-        <a:fillRef idx="0">
-          <a:schemeClr val="accent1"/>
-        </a:fillRef>
-        <a:effectRef idx="1">
-          <a:schemeClr val="accent1"/>
-        </a:effectRef>
-        <a:fontRef idx="minor">
-          <a:schemeClr val="tx1"/>
-        </a:fontRef>
-      </a:style>
-    </a:lnDef>
-  </a:objectDefaults>
-  <a:extraClrSchemeLst/>
-  <a:extLst>
-    <a:ext uri="{05A4C25C-085E-4340-85A3-A5531E510DB2}">
-      <thm15:themeFamily xmlns:thm15="http://schemas.microsoft.com/office/thememl/2012/main" name="Office Theme" id="{2E142A2C-CD16-42D6-873A-C26D2A0506FA}" vid="{1BDDFF52-6CD6-40A5-AB3C-68EB2F1E4D0A}"/>
-    </a:ext>
-  </a:extLst>
-</a:theme>
 </file>
--- a/presentation.pptx
+++ b/presentation.pptx
@@ -4,6 +4,9 @@
   <p:sldMasterIdLst>
     <p:sldMasterId id="2147483648" r:id="rId1"/>
   </p:sldMasterIdLst>
+  <p:notesMasterIdLst>
+    <p:notesMasterId r:id="rId24"/>
+  </p:notesMasterIdLst>
   <p:sldIdLst>
     <p:sldId id="256" r:id="rId2"/>
     <p:sldId id="257" r:id="rId3"/>
@@ -27,15 +30,7 @@
     <p:sldId id="275" r:id="rId21"/>
     <p:sldId id="276" r:id="rId22"/>
     <p:sldId id="277" r:id="rId23"/>
-    <p:sldId id="278" r:id="rId24"/>
-    <p:sldId id="279" r:id="rId25"/>
-    <p:sldId id="280" r:id="rId26"/>
-    <p:sldId id="281" r:id="rId27"/>
-    <p:sldId id="282" r:id="rId28"/>
   </p:sldIdLst>
-  <p:notesMasterIdLst>
-    <p:notesMasterId r:id="rId29"/>
-  </p:notesMasterIdLst>
   <p:sldSz cx="12192000" cy="6858000"/>
   <p:notesSz cx="6858000" cy="12192000"/>
   <p:defaultTextStyle>
@@ -130,7 +125,49 @@
       </a:defRPr>
     </a:lvl9pPr>
   </p:defaultTextStyle>
+  <p:extLst>
+    <p:ext uri="{EFAFB233-063F-42B5-8137-9DF3F51BA10A}">
+      <p15:sldGuideLst xmlns:p15="http://schemas.microsoft.com/office/powerpoint/2012/main"/>
+    </p:ext>
+  </p:extLst>
 </p:presentation>
+</file>
+
+<file path=ppt/revisionInfo.xml><?xml version="1.0" encoding="utf-8"?>
+<p1510:revInfo xmlns:a="http://schemas.openxmlformats.org/drawingml/2006/main" xmlns:r="http://schemas.openxmlformats.org/officeDocument/2006/relationships" xmlns:p1510="http://schemas.microsoft.com/office/powerpoint/2015/10/main">
+  <p1510:revLst>
+    <p1510:client id="{9D4E8D16-CB59-414D-86FD-83CDA54E0077}" v="1" dt="2026-09-02T15:40:57.905"/>
+  </p1510:revLst>
+</p1510:revInfo>
+</file>
+
+<file path=ppt/changesInfos/changesInfo1.xml><?xml version="1.0" encoding="utf-8"?>
+<pc:chgInfo xmlns:a="http://schemas.openxmlformats.org/drawingml/2006/main" xmlns:r="http://schemas.openxmlformats.org/officeDocument/2006/relationships" xmlns:ac="http://schemas.microsoft.com/office/drawing/2013/main/command" xmlns:pc="http://schemas.microsoft.com/office/powerpoint/2013/main/command">
+  <pc:docChgLst>
+    <pc:chgData name="Luca Cussigh" userId="368af960-6488-4d64-b4ce-638e2566cd2b" providerId="ADAL" clId="{F11DC404-7128-42C3-A4C0-983A4FB681AD}"/>
+    <pc:docChg chg="modSld">
+      <pc:chgData name="Luca Cussigh" userId="368af960-6488-4d64-b4ce-638e2566cd2b" providerId="ADAL" clId="{F11DC404-7128-42C3-A4C0-983A4FB681AD}" dt="2026-09-02T15:40:58.918" v="2"/>
+      <pc:docMkLst>
+        <pc:docMk/>
+      </pc:docMkLst>
+      <pc:sldChg chg="addSp delSp modSp mod">
+        <pc:chgData name="Luca Cussigh" userId="368af960-6488-4d64-b4ce-638e2566cd2b" providerId="ADAL" clId="{F11DC404-7128-42C3-A4C0-983A4FB681AD}" dt="2026-09-02T15:40:58.918" v="2"/>
+        <pc:sldMkLst>
+          <pc:docMk/>
+          <pc:sldMk cId="0" sldId="266"/>
+        </pc:sldMkLst>
+        <pc:spChg chg="add del mod">
+          <ac:chgData name="Luca Cussigh" userId="368af960-6488-4d64-b4ce-638e2566cd2b" providerId="ADAL" clId="{F11DC404-7128-42C3-A4C0-983A4FB681AD}" dt="2026-09-02T15:40:58.918" v="2"/>
+          <ac:spMkLst>
+            <pc:docMk/>
+            <pc:sldMk cId="0" sldId="266"/>
+            <ac:spMk id="2" creationId="{E25E5DA8-FAC9-623C-ECD4-0051DFD55C55}"/>
+          </ac:spMkLst>
+        </pc:spChg>
+      </pc:sldChg>
+    </pc:docChg>
+  </pc:docChgLst>
+</pc:chgInfo>
 </file>
 
 <file path=ppt/notesMasters/notesMaster1.xml><?xml version="1.0" encoding="utf-8"?>
@@ -155,234 +192,10 @@
           <a:chExt cx="0" cy="0"/>
         </a:xfrm>
       </p:grpSpPr>
-      <p:sp>
-        <p:nvSpPr>
-          <p:cNvPr id="2" name="Header Placeholder 1"/>
-          <p:cNvSpPr>
-            <a:spLocks noGrp="1"/>
-          </p:cNvSpPr>
-          <p:nvPr>
-            <p:ph type="hdr" sz="quarter"/>
-          </p:nvPr>
-        </p:nvSpPr>
-        <p:spPr>
-          <a:xfrm>
-            <a:off x="0" y="0"/>
-            <a:ext cx="2971800" cy="458788"/>
-          </a:xfrm>
-          <a:prstGeom prst="rect">
-            <a:avLst/>
-          </a:prstGeom>
-        </p:spPr>
-        <p:txBody>
-          <a:bodyPr vert="horz" lIns="91440" tIns="45720" rIns="91440" bIns="45720" rtlCol="0"/>
-          <a:lstStyle>
-            <a:lvl1pPr algn="l">
-              <a:defRPr sz="1200"/>
-            </a:lvl1pPr>
-          </a:lstStyle>
-          <a:p>
-            <a:endParaRPr lang="en-US"/>
-          </a:p>
-        </p:txBody>
-      </p:sp>
-      <p:sp>
-        <p:nvSpPr>
-          <p:cNvPr id="3" name="Date Placeholder 2"/>
-          <p:cNvSpPr>
-            <a:spLocks noGrp="1"/>
-          </p:cNvSpPr>
-          <p:nvPr>
-            <p:ph type="dt" idx="1"/>
-          </p:nvPr>
-        </p:nvSpPr>
-        <p:spPr>
-          <a:xfrm>
-            <a:off x="3884613" y="0"/>
-            <a:ext cx="2971800" cy="458788"/>
-          </a:xfrm>
-          <a:prstGeom prst="rect">
-            <a:avLst/>
-          </a:prstGeom>
-        </p:spPr>
-        <p:txBody>
-          <a:bodyPr vert="horz" lIns="91440" tIns="45720" rIns="91440" bIns="45720" rtlCol="0"/>
-          <a:lstStyle>
-            <a:lvl1pPr algn="r">
-              <a:defRPr sz="1200"/>
-            </a:lvl1pPr>
-          </a:lstStyle>
-          <a:p>
-            <a:fld id="{5282F153-3F37-0F45-9E97-73ACFA13230C}" type="datetimeFigureOut">
-              <a:rPr lang="en-US"/>
-              <a:t>7/23/19</a:t>
-            </a:fld>
-            <a:endParaRPr lang="en-US"/>
-          </a:p>
-        </p:txBody>
-      </p:sp>
-      <p:sp>
-        <p:nvSpPr>
-          <p:cNvPr id="4" name="Slide Image Placeholder 3"/>
-          <p:cNvSpPr>
-            <a:spLocks noGrp="1" noRot="1" noChangeAspect="1"/>
-          </p:cNvSpPr>
-          <p:nvPr>
-            <p:ph type="sldImg" idx="2"/>
-          </p:nvPr>
-        </p:nvSpPr>
-        <p:spPr>
-          <a:xfrm>
-            <a:off x="685800" y="1143000"/>
-            <a:ext cx="5486400" cy="3086100"/>
-          </a:xfrm>
-          <a:prstGeom prst="rect">
-            <a:avLst/>
-          </a:prstGeom>
-          <a:noFill/>
-          <a:ln w="12700">
-            <a:solidFill>
-              <a:prstClr val="black"/>
-            </a:solidFill>
-          </a:ln>
-        </p:spPr>
-        <p:txBody>
-          <a:bodyPr vert="horz" lIns="91440" tIns="45720" rIns="91440" bIns="45720" rtlCol="0" anchor="ctr"/>
-          <a:lstStyle/>
-          <a:p>
-            <a:endParaRPr lang="en-US"/>
-          </a:p>
-        </p:txBody>
-      </p:sp>
-      <p:sp>
-        <p:nvSpPr>
-          <p:cNvPr id="5" name="Notes Placeholder 4"/>
-          <p:cNvSpPr>
-            <a:spLocks noGrp="1"/>
-          </p:cNvSpPr>
-          <p:nvPr>
-            <p:ph type="body" sz="quarter" idx="3"/>
-          </p:nvPr>
-        </p:nvSpPr>
-        <p:spPr>
-          <a:xfrm>
-            <a:off x="685800" y="4400550"/>
-            <a:ext cx="5486400" cy="3600450"/>
-          </a:xfrm>
-          <a:prstGeom prst="rect">
-            <a:avLst/>
-          </a:prstGeom>
-        </p:spPr>
-        <p:txBody>
-          <a:bodyPr vert="horz" lIns="91440" tIns="45720" rIns="91440" bIns="45720" rtlCol="0"/>
-          <a:lstStyle/>
-          <a:p>
-            <a:pPr lvl="0"/>
-            <a:r>
-              <a:rPr lang="en-US"/>
-              <a:t>Click to edit Master text styles</a:t>
-            </a:r>
-          </a:p>
-          <a:p>
-            <a:pPr lvl="1"/>
-            <a:r>
-              <a:rPr lang="en-US"/>
-              <a:t>Second level</a:t>
-            </a:r>
-          </a:p>
-          <a:p>
-            <a:pPr lvl="2"/>
-            <a:r>
-              <a:rPr lang="en-US"/>
-              <a:t>Third level</a:t>
-            </a:r>
-          </a:p>
-          <a:p>
-            <a:pPr lvl="3"/>
-            <a:r>
-              <a:rPr lang="en-US"/>
-              <a:t>Fourth level</a:t>
-            </a:r>
-          </a:p>
-          <a:p>
-            <a:pPr lvl="4"/>
-            <a:r>
-              <a:rPr lang="en-US"/>
-              <a:t>Fifth level</a:t>
-            </a:r>
-          </a:p>
-        </p:txBody>
-      </p:sp>
-      <p:sp>
-        <p:nvSpPr>
-          <p:cNvPr id="6" name="Footer Placeholder 5"/>
-          <p:cNvSpPr>
-            <a:spLocks noGrp="1"/>
-          </p:cNvSpPr>
-          <p:nvPr>
-            <p:ph type="ftr" sz="quarter" idx="4"/>
-          </p:nvPr>
-        </p:nvSpPr>
-        <p:spPr>
-          <a:xfrm>
-            <a:off x="0" y="8685213"/>
-            <a:ext cx="2971800" cy="458787"/>
-          </a:xfrm>
-          <a:prstGeom prst="rect">
-            <a:avLst/>
-          </a:prstGeom>
-        </p:spPr>
-        <p:txBody>
-          <a:bodyPr vert="horz" lIns="91440" tIns="45720" rIns="91440" bIns="45720" rtlCol="0" anchor="b"/>
-          <a:lstStyle>
-            <a:lvl1pPr algn="l">
-              <a:defRPr sz="1200"/>
-            </a:lvl1pPr>
-          </a:lstStyle>
-          <a:p>
-            <a:endParaRPr lang="en-US"/>
-          </a:p>
-        </p:txBody>
-      </p:sp>
-      <p:sp>
-        <p:nvSpPr>
-          <p:cNvPr id="7" name="Slide Number Placeholder 6"/>
-          <p:cNvSpPr>
-            <a:spLocks noGrp="1"/>
-          </p:cNvSpPr>
-          <p:nvPr>
-            <p:ph type="sldNum" sz="quarter" idx="5"/>
-          </p:nvPr>
-        </p:nvSpPr>
-        <p:spPr>
-          <a:xfrm>
-            <a:off x="3884613" y="8685213"/>
-            <a:ext cx="2971800" cy="458787"/>
-          </a:xfrm>
-          <a:prstGeom prst="rect">
-            <a:avLst/>
-          </a:prstGeom>
-        </p:spPr>
-        <p:txBody>
-          <a:bodyPr vert="horz" lIns="91440" tIns="45720" rIns="91440" bIns="45720" rtlCol="0" anchor="b"/>
-          <a:lstStyle>
-            <a:lvl1pPr algn="r">
-              <a:defRPr sz="1200"/>
-            </a:lvl1pPr>
-          </a:lstStyle>
-          <a:p>
-            <a:fld id="{CE5E9CC1-C706-0F49-92D6-E571CC5EEA8F}" type="slidenum">
-              <a:rPr lang="en-US"/>
-              <a:t>‹#›</a:t>
-            </a:fld>
-            <a:endParaRPr lang="en-US"/>
-          </a:p>
-        </p:txBody>
-      </p:sp>
     </p:spTree>
     <p:extLst>
       <p:ext uri="{BB962C8B-B14F-4D97-AF65-F5344CB8AC3E}">
-        <p14:creationId xmlns:p14="http://schemas.microsoft.com/office/powerpoint/2010/main" val="1024086991"/>
+        <p14:creationId xmlns:p14="http://schemas.microsoft.com/office/powerpoint/2010/main" val="2225788001"/>
       </p:ext>
     </p:extLst>
   </p:cSld>
@@ -526,10 +339,6 @@
           <a:bodyPr/>
           <a:lstStyle/>
           <a:p>
-            <a:r>
-              <a:rPr lang="en-US" dirty="0"/>
-              <a:t/>
-            </a:r>
             <a:endParaRPr lang="en-US" dirty="0"/>
           </a:p>
         </p:txBody>
@@ -571,182 +380,6 @@
 </file>
 
 <file path=ppt/notesSlides/notesSlide10.xml><?xml version="1.0" encoding="utf-8"?>
-<p:notes xmlns:a="http://schemas.openxmlformats.org/drawingml/2006/main" xmlns:r="http://schemas.openxmlformats.org/officeDocument/2006/relationships" xmlns:p="http://schemas.openxmlformats.org/presentationml/2006/main">
-  <p:cSld>
-    <p:spTree>
-      <p:nvGrpSpPr>
-        <p:cNvPr id="1" name=""/>
-        <p:cNvGrpSpPr/>
-        <p:nvPr/>
-      </p:nvGrpSpPr>
-      <p:grpSpPr>
-        <a:xfrm>
-          <a:off x="0" y="0"/>
-          <a:ext cx="0" cy="0"/>
-          <a:chOff x="0" y="0"/>
-          <a:chExt cx="0" cy="0"/>
-        </a:xfrm>
-      </p:grpSpPr>
-      <p:sp>
-        <p:nvSpPr>
-          <p:cNvPr id="2" name="Slide Image Placeholder 1"/>
-          <p:cNvSpPr>
-            <a:spLocks noGrp="1" noRot="1" noChangeAspect="1"/>
-          </p:cNvSpPr>
-          <p:nvPr>
-            <p:ph type="sldImg"/>
-          </p:nvPr>
-        </p:nvSpPr>
-        <p:spPr/>
-      </p:sp>
-      <p:sp>
-        <p:nvSpPr>
-          <p:cNvPr id="3" name="Notes Placeholder 2"/>
-          <p:cNvSpPr>
-            <a:spLocks noGrp="1"/>
-          </p:cNvSpPr>
-          <p:nvPr>
-            <p:ph type="body" idx="1"/>
-          </p:nvPr>
-        </p:nvSpPr>
-        <p:spPr/>
-        <p:txBody>
-          <a:bodyPr/>
-          <a:lstStyle/>
-          <a:p>
-            <a:r>
-              <a:rPr lang="en-US" dirty="0"/>
-              <a:t/>
-            </a:r>
-            <a:endParaRPr lang="en-US" dirty="0"/>
-          </a:p>
-        </p:txBody>
-      </p:sp>
-      <p:sp>
-        <p:nvSpPr>
-          <p:cNvPr id="4" name="Slide Number Placeholder 3"/>
-          <p:cNvSpPr>
-            <a:spLocks noGrp="1"/>
-          </p:cNvSpPr>
-          <p:nvPr>
-            <p:ph type="sldNum" sz="quarter" idx="10"/>
-          </p:nvPr>
-        </p:nvSpPr>
-        <p:spPr/>
-        <p:txBody>
-          <a:bodyPr/>
-          <a:lstStyle/>
-          <a:p>
-            <a:fld id="{F7021451-1387-4CA6-816F-3879F97B5CBC}" type="slidenum">
-              <a:rPr lang="en-US"/>
-              <a:t>10</a:t>
-            </a:fld>
-            <a:endParaRPr lang="en-US"/>
-          </a:p>
-        </p:txBody>
-      </p:sp>
-    </p:spTree>
-    <p:extLst>
-      <p:ext uri="{BB962C8B-B14F-4D97-AF65-F5344CB8AC3E}">
-        <p14:creationId xmlns:p14="http://schemas.microsoft.com/office/powerpoint/2010/main" val="1024086991"/>
-      </p:ext>
-    </p:extLst>
-  </p:cSld>
-  <p:clrMapOvr>
-    <a:masterClrMapping/>
-  </p:clrMapOvr>
-</p:notes>
-</file>
-
-<file path=ppt/notesSlides/notesSlide11.xml><?xml version="1.0" encoding="utf-8"?>
-<p:notes xmlns:a="http://schemas.openxmlformats.org/drawingml/2006/main" xmlns:r="http://schemas.openxmlformats.org/officeDocument/2006/relationships" xmlns:p="http://schemas.openxmlformats.org/presentationml/2006/main">
-  <p:cSld>
-    <p:spTree>
-      <p:nvGrpSpPr>
-        <p:cNvPr id="1" name=""/>
-        <p:cNvGrpSpPr/>
-        <p:nvPr/>
-      </p:nvGrpSpPr>
-      <p:grpSpPr>
-        <a:xfrm>
-          <a:off x="0" y="0"/>
-          <a:ext cx="0" cy="0"/>
-          <a:chOff x="0" y="0"/>
-          <a:chExt cx="0" cy="0"/>
-        </a:xfrm>
-      </p:grpSpPr>
-      <p:sp>
-        <p:nvSpPr>
-          <p:cNvPr id="2" name="Slide Image Placeholder 1"/>
-          <p:cNvSpPr>
-            <a:spLocks noGrp="1" noRot="1" noChangeAspect="1"/>
-          </p:cNvSpPr>
-          <p:nvPr>
-            <p:ph type="sldImg"/>
-          </p:nvPr>
-        </p:nvSpPr>
-        <p:spPr/>
-      </p:sp>
-      <p:sp>
-        <p:nvSpPr>
-          <p:cNvPr id="3" name="Notes Placeholder 2"/>
-          <p:cNvSpPr>
-            <a:spLocks noGrp="1"/>
-          </p:cNvSpPr>
-          <p:nvPr>
-            <p:ph type="body" idx="1"/>
-          </p:nvPr>
-        </p:nvSpPr>
-        <p:spPr/>
-        <p:txBody>
-          <a:bodyPr/>
-          <a:lstStyle/>
-          <a:p>
-            <a:r>
-              <a:rPr lang="en-US" dirty="0"/>
-              <a:t/>
-            </a:r>
-            <a:endParaRPr lang="en-US" dirty="0"/>
-          </a:p>
-        </p:txBody>
-      </p:sp>
-      <p:sp>
-        <p:nvSpPr>
-          <p:cNvPr id="4" name="Slide Number Placeholder 3"/>
-          <p:cNvSpPr>
-            <a:spLocks noGrp="1"/>
-          </p:cNvSpPr>
-          <p:nvPr>
-            <p:ph type="sldNum" sz="quarter" idx="10"/>
-          </p:nvPr>
-        </p:nvSpPr>
-        <p:spPr/>
-        <p:txBody>
-          <a:bodyPr/>
-          <a:lstStyle/>
-          <a:p>
-            <a:fld id="{F7021451-1387-4CA6-816F-3879F97B5CBC}" type="slidenum">
-              <a:rPr lang="en-US"/>
-              <a:t>11</a:t>
-            </a:fld>
-            <a:endParaRPr lang="en-US"/>
-          </a:p>
-        </p:txBody>
-      </p:sp>
-    </p:spTree>
-    <p:extLst>
-      <p:ext uri="{BB962C8B-B14F-4D97-AF65-F5344CB8AC3E}">
-        <p14:creationId xmlns:p14="http://schemas.microsoft.com/office/powerpoint/2010/main" val="1024086991"/>
-      </p:ext>
-    </p:extLst>
-  </p:cSld>
-  <p:clrMapOvr>
-    <a:masterClrMapping/>
-  </p:clrMapOvr>
-</p:notes>
-</file>
-
-<file path=ppt/notesSlides/notesSlide12.xml><?xml version="1.0" encoding="utf-8"?>
 <p:notes xmlns:a="http://schemas.openxmlformats.org/drawingml/2006/main" xmlns:r="http://schemas.openxmlformats.org/officeDocument/2006/relationships" xmlns:p="http://schemas.openxmlformats.org/presentationml/2006/main">
   <p:cSld>
     <p:spTree>
@@ -800,7 +433,6 @@
 - Narrative: "Oscar the meerkat" task (no explicit ethnic labels)
 - Children evaluate face pairs without social priming</a:t>
             </a:r>
-            <a:endParaRPr lang="en-US" dirty="0"/>
           </a:p>
         </p:txBody>
       </p:sp>
@@ -821,7 +453,7 @@
           <a:p>
             <a:fld id="{F7021451-1387-4CA6-816F-3879F97B5CBC}" type="slidenum">
               <a:rPr lang="en-US"/>
-              <a:t>12</a:t>
+              <a:t>10</a:t>
             </a:fld>
             <a:endParaRPr lang="en-US"/>
           </a:p>
@@ -840,7 +472,7 @@
 </p:notes>
 </file>
 
-<file path=ppt/notesSlides/notesSlide13.xml><?xml version="1.0" encoding="utf-8"?>
+<file path=ppt/notesSlides/notesSlide11.xml><?xml version="1.0" encoding="utf-8"?>
 <p:notes xmlns:a="http://schemas.openxmlformats.org/drawingml/2006/main" xmlns:r="http://schemas.openxmlformats.org/officeDocument/2006/relationships" xmlns:p="http://schemas.openxmlformats.org/presentationml/2006/main">
   <p:cSld>
     <p:spTree>
@@ -884,10 +516,6 @@
           <a:bodyPr/>
           <a:lstStyle/>
           <a:p>
-            <a:r>
-              <a:rPr lang="en-US" dirty="0"/>
-              <a:t/>
-            </a:r>
             <a:endParaRPr lang="en-US" dirty="0"/>
           </a:p>
         </p:txBody>
@@ -909,7 +537,7 @@
           <a:p>
             <a:fld id="{F7021451-1387-4CA6-816F-3879F97B5CBC}" type="slidenum">
               <a:rPr lang="en-US"/>
-              <a:t>13</a:t>
+              <a:t>11</a:t>
             </a:fld>
             <a:endParaRPr lang="en-US"/>
           </a:p>
@@ -928,7 +556,7 @@
 </p:notes>
 </file>
 
-<file path=ppt/notesSlides/notesSlide14.xml><?xml version="1.0" encoding="utf-8"?>
+<file path=ppt/notesSlides/notesSlide12.xml><?xml version="1.0" encoding="utf-8"?>
 <p:notes xmlns:a="http://schemas.openxmlformats.org/drawingml/2006/main" xmlns:r="http://schemas.openxmlformats.org/officeDocument/2006/relationships" xmlns:p="http://schemas.openxmlformats.org/presentationml/2006/main">
   <p:cSld>
     <p:spTree>
@@ -987,7 +615,6 @@
  Speaker Notes
 A critical question is whether these findings depend on the specific testing context. When we aligned the spatial maps from both studies using Procrustes analysis, they overlapped remarkably well. The Tucker congruence coefficients exceeded 0.93, which is well above the threshold for excellent agreement. Mantel tests confirmed that the rank-order distances between groups were consistent across contexts. This replication is crucial—it suggests that the perceptual structures we identified are genuine features of how children organize faces, not artifacts created by experimenter presence or online testing constraints.</a:t>
             </a:r>
-            <a:endParaRPr lang="en-US" dirty="0"/>
           </a:p>
         </p:txBody>
       </p:sp>
@@ -1008,7 +635,7 @@
           <a:p>
             <a:fld id="{F7021451-1387-4CA6-816F-3879F97B5CBC}" type="slidenum">
               <a:rPr lang="en-US"/>
-              <a:t>14</a:t>
+              <a:t>12</a:t>
             </a:fld>
             <a:endParaRPr lang="en-US"/>
           </a:p>
@@ -1027,7 +654,7 @@
 </p:notes>
 </file>
 
-<file path=ppt/notesSlides/notesSlide15.xml><?xml version="1.0" encoding="utf-8"?>
+<file path=ppt/notesSlides/notesSlide13.xml><?xml version="1.0" encoding="utf-8"?>
 <p:notes xmlns:a="http://schemas.openxmlformats.org/drawingml/2006/main" xmlns:r="http://schemas.openxmlformats.org/officeDocument/2006/relationships" xmlns:p="http://schemas.openxmlformats.org/presentationml/2006/main">
   <p:cSld>
     <p:spTree>
@@ -1071,10 +698,6 @@
           <a:bodyPr/>
           <a:lstStyle/>
           <a:p>
-            <a:r>
-              <a:rPr lang="en-US" dirty="0"/>
-              <a:t/>
-            </a:r>
             <a:endParaRPr lang="en-US" dirty="0"/>
           </a:p>
         </p:txBody>
@@ -1096,7 +719,7 @@
           <a:p>
             <a:fld id="{F7021451-1387-4CA6-816F-3879F97B5CBC}" type="slidenum">
               <a:rPr lang="en-US"/>
-              <a:t>15</a:t>
+              <a:t>13</a:t>
             </a:fld>
             <a:endParaRPr lang="en-US"/>
           </a:p>
@@ -1115,7 +738,7 @@
 </p:notes>
 </file>
 
-<file path=ppt/notesSlides/notesSlide16.xml><?xml version="1.0" encoding="utf-8"?>
+<file path=ppt/notesSlides/notesSlide14.xml><?xml version="1.0" encoding="utf-8"?>
 <p:notes xmlns:a="http://schemas.openxmlformats.org/drawingml/2006/main" xmlns:r="http://schemas.openxmlformats.org/officeDocument/2006/relationships" xmlns:p="http://schemas.openxmlformats.org/presentationml/2006/main">
   <p:cSld>
     <p:spTree>
@@ -1201,6 +824,173 @@
 &lt;!-- Speaker Notes
 Regarding the Minority-Groups Homogeneity Effect, we found it wasn't supported either. The African Descent group, for instance, was perceptually quite distant from both East Asian and Andean groups—they didn't cluster together as a unified "outgroup." This tells us that children are sensitive to the specific perceptual characteristics of each ethnic group and don't collapse multiple outgroups into a homogeneous "other." The multigroup perceptual space is richer and more nuanced than traditional categorization models suggest.</a:t>
             </a:r>
+          </a:p>
+        </p:txBody>
+      </p:sp>
+      <p:sp>
+        <p:nvSpPr>
+          <p:cNvPr id="4" name="Slide Number Placeholder 3"/>
+          <p:cNvSpPr>
+            <a:spLocks noGrp="1"/>
+          </p:cNvSpPr>
+          <p:nvPr>
+            <p:ph type="sldNum" sz="quarter" idx="10"/>
+          </p:nvPr>
+        </p:nvSpPr>
+        <p:spPr/>
+        <p:txBody>
+          <a:bodyPr/>
+          <a:lstStyle/>
+          <a:p>
+            <a:fld id="{F7021451-1387-4CA6-816F-3879F97B5CBC}" type="slidenum">
+              <a:rPr lang="en-US"/>
+              <a:t>14</a:t>
+            </a:fld>
+            <a:endParaRPr lang="en-US"/>
+          </a:p>
+        </p:txBody>
+      </p:sp>
+    </p:spTree>
+    <p:extLst>
+      <p:ext uri="{BB962C8B-B14F-4D97-AF65-F5344CB8AC3E}">
+        <p14:creationId xmlns:p14="http://schemas.microsoft.com/office/powerpoint/2010/main" val="1024086991"/>
+      </p:ext>
+    </p:extLst>
+  </p:cSld>
+  <p:clrMapOvr>
+    <a:masterClrMapping/>
+  </p:clrMapOvr>
+</p:notes>
+</file>
+
+<file path=ppt/notesSlides/notesSlide15.xml><?xml version="1.0" encoding="utf-8"?>
+<p:notes xmlns:a="http://schemas.openxmlformats.org/drawingml/2006/main" xmlns:r="http://schemas.openxmlformats.org/officeDocument/2006/relationships" xmlns:p="http://schemas.openxmlformats.org/presentationml/2006/main">
+  <p:cSld>
+    <p:spTree>
+      <p:nvGrpSpPr>
+        <p:cNvPr id="1" name=""/>
+        <p:cNvGrpSpPr/>
+        <p:nvPr/>
+      </p:nvGrpSpPr>
+      <p:grpSpPr>
+        <a:xfrm>
+          <a:off x="0" y="0"/>
+          <a:ext cx="0" cy="0"/>
+          <a:chOff x="0" y="0"/>
+          <a:chExt cx="0" cy="0"/>
+        </a:xfrm>
+      </p:grpSpPr>
+      <p:sp>
+        <p:nvSpPr>
+          <p:cNvPr id="2" name="Slide Image Placeholder 1"/>
+          <p:cNvSpPr>
+            <a:spLocks noGrp="1" noRot="1" noChangeAspect="1"/>
+          </p:cNvSpPr>
+          <p:nvPr>
+            <p:ph type="sldImg"/>
+          </p:nvPr>
+        </p:nvSpPr>
+        <p:spPr/>
+      </p:sp>
+      <p:sp>
+        <p:nvSpPr>
+          <p:cNvPr id="3" name="Notes Placeholder 2"/>
+          <p:cNvSpPr>
+            <a:spLocks noGrp="1"/>
+          </p:cNvSpPr>
+          <p:nvPr>
+            <p:ph type="body" idx="1"/>
+          </p:nvPr>
+        </p:nvSpPr>
+        <p:spPr/>
+        <p:txBody>
+          <a:bodyPr/>
+          <a:lstStyle/>
+          <a:p>
+            <a:endParaRPr lang="en-US" dirty="0"/>
+          </a:p>
+        </p:txBody>
+      </p:sp>
+      <p:sp>
+        <p:nvSpPr>
+          <p:cNvPr id="4" name="Slide Number Placeholder 3"/>
+          <p:cNvSpPr>
+            <a:spLocks noGrp="1"/>
+          </p:cNvSpPr>
+          <p:nvPr>
+            <p:ph type="sldNum" sz="quarter" idx="10"/>
+          </p:nvPr>
+        </p:nvSpPr>
+        <p:spPr/>
+        <p:txBody>
+          <a:bodyPr/>
+          <a:lstStyle/>
+          <a:p>
+            <a:fld id="{F7021451-1387-4CA6-816F-3879F97B5CBC}" type="slidenum">
+              <a:rPr lang="en-US"/>
+              <a:t>15</a:t>
+            </a:fld>
+            <a:endParaRPr lang="en-US"/>
+          </a:p>
+        </p:txBody>
+      </p:sp>
+    </p:spTree>
+    <p:extLst>
+      <p:ext uri="{BB962C8B-B14F-4D97-AF65-F5344CB8AC3E}">
+        <p14:creationId xmlns:p14="http://schemas.microsoft.com/office/powerpoint/2010/main" val="1024086991"/>
+      </p:ext>
+    </p:extLst>
+  </p:cSld>
+  <p:clrMapOvr>
+    <a:masterClrMapping/>
+  </p:clrMapOvr>
+</p:notes>
+</file>
+
+<file path=ppt/notesSlides/notesSlide16.xml><?xml version="1.0" encoding="utf-8"?>
+<p:notes xmlns:a="http://schemas.openxmlformats.org/drawingml/2006/main" xmlns:r="http://schemas.openxmlformats.org/officeDocument/2006/relationships" xmlns:p="http://schemas.openxmlformats.org/presentationml/2006/main">
+  <p:cSld>
+    <p:spTree>
+      <p:nvGrpSpPr>
+        <p:cNvPr id="1" name=""/>
+        <p:cNvGrpSpPr/>
+        <p:nvPr/>
+      </p:nvGrpSpPr>
+      <p:grpSpPr>
+        <a:xfrm>
+          <a:off x="0" y="0"/>
+          <a:ext cx="0" cy="0"/>
+          <a:chOff x="0" y="0"/>
+          <a:chExt cx="0" cy="0"/>
+        </a:xfrm>
+      </p:grpSpPr>
+      <p:sp>
+        <p:nvSpPr>
+          <p:cNvPr id="2" name="Slide Image Placeholder 1"/>
+          <p:cNvSpPr>
+            <a:spLocks noGrp="1" noRot="1" noChangeAspect="1"/>
+          </p:cNvSpPr>
+          <p:nvPr>
+            <p:ph type="sldImg"/>
+          </p:nvPr>
+        </p:nvSpPr>
+        <p:spPr/>
+      </p:sp>
+      <p:sp>
+        <p:nvSpPr>
+          <p:cNvPr id="3" name="Notes Placeholder 2"/>
+          <p:cNvSpPr>
+            <a:spLocks noGrp="1"/>
+          </p:cNvSpPr>
+          <p:nvPr>
+            <p:ph type="body" idx="1"/>
+          </p:nvPr>
+        </p:nvSpPr>
+        <p:spPr/>
+        <p:txBody>
+          <a:bodyPr/>
+          <a:lstStyle/>
+          <a:p>
             <a:endParaRPr lang="en-US" dirty="0"/>
           </a:p>
         </p:txBody>
@@ -1285,10 +1075,6 @@
           <a:bodyPr/>
           <a:lstStyle/>
           <a:p>
-            <a:r>
-              <a:rPr lang="en-US" dirty="0"/>
-              <a:t/>
-            </a:r>
             <a:endParaRPr lang="en-US" dirty="0"/>
           </a:p>
         </p:txBody>
@@ -1373,10 +1159,6 @@
           <a:bodyPr/>
           <a:lstStyle/>
           <a:p>
-            <a:r>
-              <a:rPr lang="en-US" dirty="0"/>
-              <a:t/>
-            </a:r>
             <a:endParaRPr lang="en-US" dirty="0"/>
           </a:p>
         </p:txBody>
@@ -1461,10 +1243,6 @@
           <a:bodyPr/>
           <a:lstStyle/>
           <a:p>
-            <a:r>
-              <a:rPr lang="en-US" dirty="0"/>
-              <a:t/>
-            </a:r>
             <a:endParaRPr lang="en-US" dirty="0"/>
           </a:p>
         </p:txBody>
@@ -1551,9 +1329,15 @@
           <a:p>
             <a:r>
               <a:rPr lang="en-US" dirty="0"/>
-              <a:t/>
+              <a:t>"In 2023, Member States issued more than 3.7 million residence permits to non-EU
+citizens from more than 170 countries."
+https://www.europarl.europa.eu/doceo/document/E-10-2025-000294-ASW_EN.html
+---
+# Social Categorization
+Social categorization changes how people perceive, evaluate, remember, and treat
+one another (Amodio &amp; Cikara, 2021; Levy et al., 2023; Rhodes &amp; Baron, 2019)
+---</a:t>
             </a:r>
-            <a:endParaRPr lang="en-US" dirty="0"/>
           </a:p>
         </p:txBody>
       </p:sp>
@@ -1594,358 +1378,6 @@
 </file>
 
 <file path=ppt/notesSlides/notesSlide20.xml><?xml version="1.0" encoding="utf-8"?>
-<p:notes xmlns:a="http://schemas.openxmlformats.org/drawingml/2006/main" xmlns:r="http://schemas.openxmlformats.org/officeDocument/2006/relationships" xmlns:p="http://schemas.openxmlformats.org/presentationml/2006/main">
-  <p:cSld>
-    <p:spTree>
-      <p:nvGrpSpPr>
-        <p:cNvPr id="1" name=""/>
-        <p:cNvGrpSpPr/>
-        <p:nvPr/>
-      </p:nvGrpSpPr>
-      <p:grpSpPr>
-        <a:xfrm>
-          <a:off x="0" y="0"/>
-          <a:ext cx="0" cy="0"/>
-          <a:chOff x="0" y="0"/>
-          <a:chExt cx="0" cy="0"/>
-        </a:xfrm>
-      </p:grpSpPr>
-      <p:sp>
-        <p:nvSpPr>
-          <p:cNvPr id="2" name="Slide Image Placeholder 1"/>
-          <p:cNvSpPr>
-            <a:spLocks noGrp="1" noRot="1" noChangeAspect="1"/>
-          </p:cNvSpPr>
-          <p:nvPr>
-            <p:ph type="sldImg"/>
-          </p:nvPr>
-        </p:nvSpPr>
-        <p:spPr/>
-      </p:sp>
-      <p:sp>
-        <p:nvSpPr>
-          <p:cNvPr id="3" name="Notes Placeholder 2"/>
-          <p:cNvSpPr>
-            <a:spLocks noGrp="1"/>
-          </p:cNvSpPr>
-          <p:nvPr>
-            <p:ph type="body" idx="1"/>
-          </p:nvPr>
-        </p:nvSpPr>
-        <p:spPr/>
-        <p:txBody>
-          <a:bodyPr/>
-          <a:lstStyle/>
-          <a:p>
-            <a:r>
-              <a:rPr lang="en-US" dirty="0"/>
-              <a:t/>
-            </a:r>
-            <a:endParaRPr lang="en-US" dirty="0"/>
-          </a:p>
-        </p:txBody>
-      </p:sp>
-      <p:sp>
-        <p:nvSpPr>
-          <p:cNvPr id="4" name="Slide Number Placeholder 3"/>
-          <p:cNvSpPr>
-            <a:spLocks noGrp="1"/>
-          </p:cNvSpPr>
-          <p:nvPr>
-            <p:ph type="sldNum" sz="quarter" idx="10"/>
-          </p:nvPr>
-        </p:nvSpPr>
-        <p:spPr/>
-        <p:txBody>
-          <a:bodyPr/>
-          <a:lstStyle/>
-          <a:p>
-            <a:fld id="{F7021451-1387-4CA6-816F-3879F97B5CBC}" type="slidenum">
-              <a:rPr lang="en-US"/>
-              <a:t>20</a:t>
-            </a:fld>
-            <a:endParaRPr lang="en-US"/>
-          </a:p>
-        </p:txBody>
-      </p:sp>
-    </p:spTree>
-    <p:extLst>
-      <p:ext uri="{BB962C8B-B14F-4D97-AF65-F5344CB8AC3E}">
-        <p14:creationId xmlns:p14="http://schemas.microsoft.com/office/powerpoint/2010/main" val="1024086991"/>
-      </p:ext>
-    </p:extLst>
-  </p:cSld>
-  <p:clrMapOvr>
-    <a:masterClrMapping/>
-  </p:clrMapOvr>
-</p:notes>
-</file>
-
-<file path=ppt/notesSlides/notesSlide21.xml><?xml version="1.0" encoding="utf-8"?>
-<p:notes xmlns:a="http://schemas.openxmlformats.org/drawingml/2006/main" xmlns:r="http://schemas.openxmlformats.org/officeDocument/2006/relationships" xmlns:p="http://schemas.openxmlformats.org/presentationml/2006/main">
-  <p:cSld>
-    <p:spTree>
-      <p:nvGrpSpPr>
-        <p:cNvPr id="1" name=""/>
-        <p:cNvGrpSpPr/>
-        <p:nvPr/>
-      </p:nvGrpSpPr>
-      <p:grpSpPr>
-        <a:xfrm>
-          <a:off x="0" y="0"/>
-          <a:ext cx="0" cy="0"/>
-          <a:chOff x="0" y="0"/>
-          <a:chExt cx="0" cy="0"/>
-        </a:xfrm>
-      </p:grpSpPr>
-      <p:sp>
-        <p:nvSpPr>
-          <p:cNvPr id="2" name="Slide Image Placeholder 1"/>
-          <p:cNvSpPr>
-            <a:spLocks noGrp="1" noRot="1" noChangeAspect="1"/>
-          </p:cNvSpPr>
-          <p:nvPr>
-            <p:ph type="sldImg"/>
-          </p:nvPr>
-        </p:nvSpPr>
-        <p:spPr/>
-      </p:sp>
-      <p:sp>
-        <p:nvSpPr>
-          <p:cNvPr id="3" name="Notes Placeholder 2"/>
-          <p:cNvSpPr>
-            <a:spLocks noGrp="1"/>
-          </p:cNvSpPr>
-          <p:nvPr>
-            <p:ph type="body" idx="1"/>
-          </p:nvPr>
-        </p:nvSpPr>
-        <p:spPr/>
-        <p:txBody>
-          <a:bodyPr/>
-          <a:lstStyle/>
-          <a:p>
-            <a:r>
-              <a:rPr lang="en-US" dirty="0"/>
-              <a:t/>
-            </a:r>
-            <a:endParaRPr lang="en-US" dirty="0"/>
-          </a:p>
-        </p:txBody>
-      </p:sp>
-      <p:sp>
-        <p:nvSpPr>
-          <p:cNvPr id="4" name="Slide Number Placeholder 3"/>
-          <p:cNvSpPr>
-            <a:spLocks noGrp="1"/>
-          </p:cNvSpPr>
-          <p:nvPr>
-            <p:ph type="sldNum" sz="quarter" idx="10"/>
-          </p:nvPr>
-        </p:nvSpPr>
-        <p:spPr/>
-        <p:txBody>
-          <a:bodyPr/>
-          <a:lstStyle/>
-          <a:p>
-            <a:fld id="{F7021451-1387-4CA6-816F-3879F97B5CBC}" type="slidenum">
-              <a:rPr lang="en-US"/>
-              <a:t>21</a:t>
-            </a:fld>
-            <a:endParaRPr lang="en-US"/>
-          </a:p>
-        </p:txBody>
-      </p:sp>
-    </p:spTree>
-    <p:extLst>
-      <p:ext uri="{BB962C8B-B14F-4D97-AF65-F5344CB8AC3E}">
-        <p14:creationId xmlns:p14="http://schemas.microsoft.com/office/powerpoint/2010/main" val="1024086991"/>
-      </p:ext>
-    </p:extLst>
-  </p:cSld>
-  <p:clrMapOvr>
-    <a:masterClrMapping/>
-  </p:clrMapOvr>
-</p:notes>
-</file>
-
-<file path=ppt/notesSlides/notesSlide22.xml><?xml version="1.0" encoding="utf-8"?>
-<p:notes xmlns:a="http://schemas.openxmlformats.org/drawingml/2006/main" xmlns:r="http://schemas.openxmlformats.org/officeDocument/2006/relationships" xmlns:p="http://schemas.openxmlformats.org/presentationml/2006/main">
-  <p:cSld>
-    <p:spTree>
-      <p:nvGrpSpPr>
-        <p:cNvPr id="1" name=""/>
-        <p:cNvGrpSpPr/>
-        <p:nvPr/>
-      </p:nvGrpSpPr>
-      <p:grpSpPr>
-        <a:xfrm>
-          <a:off x="0" y="0"/>
-          <a:ext cx="0" cy="0"/>
-          <a:chOff x="0" y="0"/>
-          <a:chExt cx="0" cy="0"/>
-        </a:xfrm>
-      </p:grpSpPr>
-      <p:sp>
-        <p:nvSpPr>
-          <p:cNvPr id="2" name="Slide Image Placeholder 1"/>
-          <p:cNvSpPr>
-            <a:spLocks noGrp="1" noRot="1" noChangeAspect="1"/>
-          </p:cNvSpPr>
-          <p:nvPr>
-            <p:ph type="sldImg"/>
-          </p:nvPr>
-        </p:nvSpPr>
-        <p:spPr/>
-      </p:sp>
-      <p:sp>
-        <p:nvSpPr>
-          <p:cNvPr id="3" name="Notes Placeholder 2"/>
-          <p:cNvSpPr>
-            <a:spLocks noGrp="1"/>
-          </p:cNvSpPr>
-          <p:nvPr>
-            <p:ph type="body" idx="1"/>
-          </p:nvPr>
-        </p:nvSpPr>
-        <p:spPr/>
-        <p:txBody>
-          <a:bodyPr/>
-          <a:lstStyle/>
-          <a:p>
-            <a:r>
-              <a:rPr lang="en-US" dirty="0"/>
-              <a:t/>
-            </a:r>
-            <a:endParaRPr lang="en-US" dirty="0"/>
-          </a:p>
-        </p:txBody>
-      </p:sp>
-      <p:sp>
-        <p:nvSpPr>
-          <p:cNvPr id="4" name="Slide Number Placeholder 3"/>
-          <p:cNvSpPr>
-            <a:spLocks noGrp="1"/>
-          </p:cNvSpPr>
-          <p:nvPr>
-            <p:ph type="sldNum" sz="quarter" idx="10"/>
-          </p:nvPr>
-        </p:nvSpPr>
-        <p:spPr/>
-        <p:txBody>
-          <a:bodyPr/>
-          <a:lstStyle/>
-          <a:p>
-            <a:fld id="{F7021451-1387-4CA6-816F-3879F97B5CBC}" type="slidenum">
-              <a:rPr lang="en-US"/>
-              <a:t>22</a:t>
-            </a:fld>
-            <a:endParaRPr lang="en-US"/>
-          </a:p>
-        </p:txBody>
-      </p:sp>
-    </p:spTree>
-    <p:extLst>
-      <p:ext uri="{BB962C8B-B14F-4D97-AF65-F5344CB8AC3E}">
-        <p14:creationId xmlns:p14="http://schemas.microsoft.com/office/powerpoint/2010/main" val="1024086991"/>
-      </p:ext>
-    </p:extLst>
-  </p:cSld>
-  <p:clrMapOvr>
-    <a:masterClrMapping/>
-  </p:clrMapOvr>
-</p:notes>
-</file>
-
-<file path=ppt/notesSlides/notesSlide23.xml><?xml version="1.0" encoding="utf-8"?>
-<p:notes xmlns:a="http://schemas.openxmlformats.org/drawingml/2006/main" xmlns:r="http://schemas.openxmlformats.org/officeDocument/2006/relationships" xmlns:p="http://schemas.openxmlformats.org/presentationml/2006/main">
-  <p:cSld>
-    <p:spTree>
-      <p:nvGrpSpPr>
-        <p:cNvPr id="1" name=""/>
-        <p:cNvGrpSpPr/>
-        <p:nvPr/>
-      </p:nvGrpSpPr>
-      <p:grpSpPr>
-        <a:xfrm>
-          <a:off x="0" y="0"/>
-          <a:ext cx="0" cy="0"/>
-          <a:chOff x="0" y="0"/>
-          <a:chExt cx="0" cy="0"/>
-        </a:xfrm>
-      </p:grpSpPr>
-      <p:sp>
-        <p:nvSpPr>
-          <p:cNvPr id="2" name="Slide Image Placeholder 1"/>
-          <p:cNvSpPr>
-            <a:spLocks noGrp="1" noRot="1" noChangeAspect="1"/>
-          </p:cNvSpPr>
-          <p:nvPr>
-            <p:ph type="sldImg"/>
-          </p:nvPr>
-        </p:nvSpPr>
-        <p:spPr/>
-      </p:sp>
-      <p:sp>
-        <p:nvSpPr>
-          <p:cNvPr id="3" name="Notes Placeholder 2"/>
-          <p:cNvSpPr>
-            <a:spLocks noGrp="1"/>
-          </p:cNvSpPr>
-          <p:nvPr>
-            <p:ph type="body" idx="1"/>
-          </p:nvPr>
-        </p:nvSpPr>
-        <p:spPr/>
-        <p:txBody>
-          <a:bodyPr/>
-          <a:lstStyle/>
-          <a:p>
-            <a:r>
-              <a:rPr lang="en-US" dirty="0"/>
-              <a:t/>
-            </a:r>
-            <a:endParaRPr lang="en-US" dirty="0"/>
-          </a:p>
-        </p:txBody>
-      </p:sp>
-      <p:sp>
-        <p:nvSpPr>
-          <p:cNvPr id="4" name="Slide Number Placeholder 3"/>
-          <p:cNvSpPr>
-            <a:spLocks noGrp="1"/>
-          </p:cNvSpPr>
-          <p:nvPr>
-            <p:ph type="sldNum" sz="quarter" idx="10"/>
-          </p:nvPr>
-        </p:nvSpPr>
-        <p:spPr/>
-        <p:txBody>
-          <a:bodyPr/>
-          <a:lstStyle/>
-          <a:p>
-            <a:fld id="{F7021451-1387-4CA6-816F-3879F97B5CBC}" type="slidenum">
-              <a:rPr lang="en-US"/>
-              <a:t>23</a:t>
-            </a:fld>
-            <a:endParaRPr lang="en-US"/>
-          </a:p>
-        </p:txBody>
-      </p:sp>
-    </p:spTree>
-    <p:extLst>
-      <p:ext uri="{BB962C8B-B14F-4D97-AF65-F5344CB8AC3E}">
-        <p14:creationId xmlns:p14="http://schemas.microsoft.com/office/powerpoint/2010/main" val="1024086991"/>
-      </p:ext>
-    </p:extLst>
-  </p:cSld>
-  <p:clrMapOvr>
-    <a:masterClrMapping/>
-  </p:clrMapOvr>
-</p:notes>
-</file>
-
-<file path=ppt/notesSlides/notesSlide24.xml><?xml version="1.0" encoding="utf-8"?>
 <p:notes xmlns:a="http://schemas.openxmlformats.org/drawingml/2006/main" xmlns:r="http://schemas.openxmlformats.org/officeDocument/2006/relationships" xmlns:p="http://schemas.openxmlformats.org/presentationml/2006/main">
   <p:cSld>
     <p:spTree>
@@ -2012,7 +1444,6 @@
  Speaker Notes
 To wrap up: Our results paint a more nuanced picture of how children perceive ethnic diversity. The classic Outgroup Homogeneity Effect and Minority-Groups Homogeneity Effect didn't emerge as predicted. Instead, children's perceptions are guided by the actual visual features of faces and organized according to face-space principles. Importantly, we see developmental changes—older children distinguish between groups more finely. Of course, our work has limitations: we haven't directly measured threat perception or cultural factors that might moderate these effects. But looking forward, this research opens new doors. Understanding the perceptual foundations of social categorization could inform school-based interventions that leverage face-space similarity principles. By helping children develop more individuated, less stereotypical representations of outgroup members—what researchers call "personalization"—we might reduce intergroup bias from the ground up. Thank you.</a:t>
             </a:r>
-            <a:endParaRPr lang="en-US" dirty="0"/>
           </a:p>
         </p:txBody>
       </p:sp>
@@ -2033,7 +1464,7 @@
           <a:p>
             <a:fld id="{F7021451-1387-4CA6-816F-3879F97B5CBC}" type="slidenum">
               <a:rPr lang="en-US"/>
-              <a:t>24</a:t>
+              <a:t>20</a:t>
             </a:fld>
             <a:endParaRPr lang="en-US"/>
           </a:p>
@@ -2052,7 +1483,7 @@
 </p:notes>
 </file>
 
-<file path=ppt/notesSlides/notesSlide25.xml><?xml version="1.0" encoding="utf-8"?>
+<file path=ppt/notesSlides/notesSlide21.xml><?xml version="1.0" encoding="utf-8"?>
 <p:notes xmlns:a="http://schemas.openxmlformats.org/drawingml/2006/main" xmlns:r="http://schemas.openxmlformats.org/officeDocument/2006/relationships" xmlns:p="http://schemas.openxmlformats.org/presentationml/2006/main">
   <p:cSld>
     <p:spTree>
@@ -2096,10 +1527,6 @@
           <a:bodyPr/>
           <a:lstStyle/>
           <a:p>
-            <a:r>
-              <a:rPr lang="en-US" dirty="0"/>
-              <a:t/>
-            </a:r>
             <a:endParaRPr lang="en-US" dirty="0"/>
           </a:p>
         </p:txBody>
@@ -2121,7 +1548,7 @@
           <a:p>
             <a:fld id="{F7021451-1387-4CA6-816F-3879F97B5CBC}" type="slidenum">
               <a:rPr lang="en-US"/>
-              <a:t>25</a:t>
+              <a:t>21</a:t>
             </a:fld>
             <a:endParaRPr lang="en-US"/>
           </a:p>
@@ -2140,7 +1567,7 @@
 </p:notes>
 </file>
 
-<file path=ppt/notesSlides/notesSlide26.xml><?xml version="1.0" encoding="utf-8"?>
+<file path=ppt/notesSlides/notesSlide22.xml><?xml version="1.0" encoding="utf-8"?>
 <p:notes xmlns:a="http://schemas.openxmlformats.org/drawingml/2006/main" xmlns:r="http://schemas.openxmlformats.org/officeDocument/2006/relationships" xmlns:p="http://schemas.openxmlformats.org/presentationml/2006/main">
   <p:cSld>
     <p:spTree>
@@ -2184,10 +1611,6 @@
           <a:bodyPr/>
           <a:lstStyle/>
           <a:p>
-            <a:r>
-              <a:rPr lang="en-US" dirty="0"/>
-              <a:t/>
-            </a:r>
             <a:endParaRPr lang="en-US" dirty="0"/>
           </a:p>
         </p:txBody>
@@ -2209,7 +1632,7 @@
           <a:p>
             <a:fld id="{F7021451-1387-4CA6-816F-3879F97B5CBC}" type="slidenum">
               <a:rPr lang="en-US"/>
-              <a:t>26</a:t>
+              <a:t>22</a:t>
             </a:fld>
             <a:endParaRPr lang="en-US"/>
           </a:p>
@@ -2228,7 +1651,7 @@
 </p:notes>
 </file>
 
-<file path=ppt/notesSlides/notesSlide27.xml><?xml version="1.0" encoding="utf-8"?>
+<file path=ppt/notesSlides/notesSlide3.xml><?xml version="1.0" encoding="utf-8"?>
 <p:notes xmlns:a="http://schemas.openxmlformats.org/drawingml/2006/main" xmlns:r="http://schemas.openxmlformats.org/officeDocument/2006/relationships" xmlns:p="http://schemas.openxmlformats.org/presentationml/2006/main">
   <p:cSld>
     <p:spTree>
@@ -2272,10 +1695,6 @@
           <a:bodyPr/>
           <a:lstStyle/>
           <a:p>
-            <a:r>
-              <a:rPr lang="en-US" dirty="0"/>
-              <a:t/>
-            </a:r>
             <a:endParaRPr lang="en-US" dirty="0"/>
           </a:p>
         </p:txBody>
@@ -2297,7 +1716,7 @@
           <a:p>
             <a:fld id="{F7021451-1387-4CA6-816F-3879F97B5CBC}" type="slidenum">
               <a:rPr lang="en-US"/>
-              <a:t>27</a:t>
+              <a:t>3</a:t>
             </a:fld>
             <a:endParaRPr lang="en-US"/>
           </a:p>
@@ -2316,7 +1735,7 @@
 </p:notes>
 </file>
 
-<file path=ppt/notesSlides/notesSlide3.xml><?xml version="1.0" encoding="utf-8"?>
+<file path=ppt/notesSlides/notesSlide4.xml><?xml version="1.0" encoding="utf-8"?>
 <p:notes xmlns:a="http://schemas.openxmlformats.org/drawingml/2006/main" xmlns:r="http://schemas.openxmlformats.org/officeDocument/2006/relationships" xmlns:p="http://schemas.openxmlformats.org/presentationml/2006/main">
   <p:cSld>
     <p:spTree>
@@ -2362,9 +1781,9 @@
           <a:p>
             <a:r>
               <a:rPr lang="en-US" dirty="0"/>
-              <a:t/>
+              <a:t>Speaker Notes
+Decades of research show that infants display early visual specialization for ingroup faces, leading to the Perceptual-Social Linkage hypothesis. Yet, when we look at childhood, specifically ages 3 to 8, the evidence for the Outgroup Homogeneity Effect becomes inconsistent. We hypothesize that traditional tasks force children into rigid, explicit categories and may not capture how they spontaneously perceive social groups.</a:t>
             </a:r>
-            <a:endParaRPr lang="en-US" dirty="0"/>
           </a:p>
         </p:txBody>
       </p:sp>
@@ -2385,7 +1804,7 @@
           <a:p>
             <a:fld id="{F7021451-1387-4CA6-816F-3879F97B5CBC}" type="slidenum">
               <a:rPr lang="en-US"/>
-              <a:t>3</a:t>
+              <a:t>4</a:t>
             </a:fld>
             <a:endParaRPr lang="en-US"/>
           </a:p>
@@ -2404,7 +1823,7 @@
 </p:notes>
 </file>
 
-<file path=ppt/notesSlides/notesSlide4.xml><?xml version="1.0" encoding="utf-8"?>
+<file path=ppt/notesSlides/notesSlide5.xml><?xml version="1.0" encoding="utf-8"?>
 <p:notes xmlns:a="http://schemas.openxmlformats.org/drawingml/2006/main" xmlns:r="http://schemas.openxmlformats.org/officeDocument/2006/relationships" xmlns:p="http://schemas.openxmlformats.org/presentationml/2006/main">
   <p:cSld>
     <p:spTree>
@@ -2448,10 +1867,6 @@
           <a:bodyPr/>
           <a:lstStyle/>
           <a:p>
-            <a:r>
-              <a:rPr lang="en-US" dirty="0"/>
-              <a:t/>
-            </a:r>
             <a:endParaRPr lang="en-US" dirty="0"/>
           </a:p>
         </p:txBody>
@@ -2473,7 +1888,7 @@
           <a:p>
             <a:fld id="{F7021451-1387-4CA6-816F-3879F97B5CBC}" type="slidenum">
               <a:rPr lang="en-US"/>
-              <a:t>4</a:t>
+              <a:t>5</a:t>
             </a:fld>
             <a:endParaRPr lang="en-US"/>
           </a:p>
@@ -2492,7 +1907,7 @@
 </p:notes>
 </file>
 
-<file path=ppt/notesSlides/notesSlide5.xml><?xml version="1.0" encoding="utf-8"?>
+<file path=ppt/notesSlides/notesSlide6.xml><?xml version="1.0" encoding="utf-8"?>
 <p:notes xmlns:a="http://schemas.openxmlformats.org/drawingml/2006/main" xmlns:r="http://schemas.openxmlformats.org/officeDocument/2006/relationships" xmlns:p="http://schemas.openxmlformats.org/presentationml/2006/main">
   <p:cSld>
     <p:spTree>
@@ -2536,11 +1951,6 @@
           <a:bodyPr/>
           <a:lstStyle/>
           <a:p>
-            <a:r>
-              <a:rPr lang="en-US" dirty="0"/>
-              <a:t>Speaker Notes
-Decades of research show that infants display early visual specialization for ingroup faces, leading to the Perceptual-Social Linkage hypothesis. Yet, when we look at childhood, specifically ages 3 to 8, the evidence for the Outgroup Homogeneity Effect becomes inconsistent. We hypothesize that traditional tasks force children into rigid, explicit categories and may not capture how they spontaneously perceive social groups.</a:t>
-            </a:r>
             <a:endParaRPr lang="en-US" dirty="0"/>
           </a:p>
         </p:txBody>
@@ -2562,7 +1972,7 @@
           <a:p>
             <a:fld id="{F7021451-1387-4CA6-816F-3879F97B5CBC}" type="slidenum">
               <a:rPr lang="en-US"/>
-              <a:t>5</a:t>
+              <a:t>6</a:t>
             </a:fld>
             <a:endParaRPr lang="en-US"/>
           </a:p>
@@ -2581,7 +1991,7 @@
 </p:notes>
 </file>
 
-<file path=ppt/notesSlides/notesSlide6.xml><?xml version="1.0" encoding="utf-8"?>
+<file path=ppt/notesSlides/notesSlide7.xml><?xml version="1.0" encoding="utf-8"?>
 <p:notes xmlns:a="http://schemas.openxmlformats.org/drawingml/2006/main" xmlns:r="http://schemas.openxmlformats.org/officeDocument/2006/relationships" xmlns:p="http://schemas.openxmlformats.org/presentationml/2006/main">
   <p:cSld>
     <p:spTree>
@@ -2625,10 +2035,6 @@
           <a:bodyPr/>
           <a:lstStyle/>
           <a:p>
-            <a:r>
-              <a:rPr lang="en-US" dirty="0"/>
-              <a:t/>
-            </a:r>
             <a:endParaRPr lang="en-US" dirty="0"/>
           </a:p>
         </p:txBody>
@@ -2650,7 +2056,7 @@
           <a:p>
             <a:fld id="{F7021451-1387-4CA6-816F-3879F97B5CBC}" type="slidenum">
               <a:rPr lang="en-US"/>
-              <a:t>6</a:t>
+              <a:t>7</a:t>
             </a:fld>
             <a:endParaRPr lang="en-US"/>
           </a:p>
@@ -2669,7 +2075,7 @@
 </p:notes>
 </file>
 
-<file path=ppt/notesSlides/notesSlide7.xml><?xml version="1.0" encoding="utf-8"?>
+<file path=ppt/notesSlides/notesSlide8.xml><?xml version="1.0" encoding="utf-8"?>
 <p:notes xmlns:a="http://schemas.openxmlformats.org/drawingml/2006/main" xmlns:r="http://schemas.openxmlformats.org/officeDocument/2006/relationships" xmlns:p="http://schemas.openxmlformats.org/presentationml/2006/main">
   <p:cSld>
     <p:spTree>
@@ -2713,10 +2119,6 @@
           <a:bodyPr/>
           <a:lstStyle/>
           <a:p>
-            <a:r>
-              <a:rPr lang="en-US" dirty="0"/>
-              <a:t/>
-            </a:r>
             <a:endParaRPr lang="en-US" dirty="0"/>
           </a:p>
         </p:txBody>
@@ -2738,7 +2140,7 @@
           <a:p>
             <a:fld id="{F7021451-1387-4CA6-816F-3879F97B5CBC}" type="slidenum">
               <a:rPr lang="en-US"/>
-              <a:t>7</a:t>
+              <a:t>8</a:t>
             </a:fld>
             <a:endParaRPr lang="en-US"/>
           </a:p>
@@ -2757,94 +2159,6 @@
 </p:notes>
 </file>
 
-<file path=ppt/notesSlides/notesSlide8.xml><?xml version="1.0" encoding="utf-8"?>
-<p:notes xmlns:a="http://schemas.openxmlformats.org/drawingml/2006/main" xmlns:r="http://schemas.openxmlformats.org/officeDocument/2006/relationships" xmlns:p="http://schemas.openxmlformats.org/presentationml/2006/main">
-  <p:cSld>
-    <p:spTree>
-      <p:nvGrpSpPr>
-        <p:cNvPr id="1" name=""/>
-        <p:cNvGrpSpPr/>
-        <p:nvPr/>
-      </p:nvGrpSpPr>
-      <p:grpSpPr>
-        <a:xfrm>
-          <a:off x="0" y="0"/>
-          <a:ext cx="0" cy="0"/>
-          <a:chOff x="0" y="0"/>
-          <a:chExt cx="0" cy="0"/>
-        </a:xfrm>
-      </p:grpSpPr>
-      <p:sp>
-        <p:nvSpPr>
-          <p:cNvPr id="2" name="Slide Image Placeholder 1"/>
-          <p:cNvSpPr>
-            <a:spLocks noGrp="1" noRot="1" noChangeAspect="1"/>
-          </p:cNvSpPr>
-          <p:nvPr>
-            <p:ph type="sldImg"/>
-          </p:nvPr>
-        </p:nvSpPr>
-        <p:spPr/>
-      </p:sp>
-      <p:sp>
-        <p:nvSpPr>
-          <p:cNvPr id="3" name="Notes Placeholder 2"/>
-          <p:cNvSpPr>
-            <a:spLocks noGrp="1"/>
-          </p:cNvSpPr>
-          <p:nvPr>
-            <p:ph type="body" idx="1"/>
-          </p:nvPr>
-        </p:nvSpPr>
-        <p:spPr/>
-        <p:txBody>
-          <a:bodyPr/>
-          <a:lstStyle/>
-          <a:p>
-            <a:r>
-              <a:rPr lang="en-US" dirty="0"/>
-              <a:t/>
-            </a:r>
-            <a:endParaRPr lang="en-US" dirty="0"/>
-          </a:p>
-        </p:txBody>
-      </p:sp>
-      <p:sp>
-        <p:nvSpPr>
-          <p:cNvPr id="4" name="Slide Number Placeholder 3"/>
-          <p:cNvSpPr>
-            <a:spLocks noGrp="1"/>
-          </p:cNvSpPr>
-          <p:nvPr>
-            <p:ph type="sldNum" sz="quarter" idx="10"/>
-          </p:nvPr>
-        </p:nvSpPr>
-        <p:spPr/>
-        <p:txBody>
-          <a:bodyPr/>
-          <a:lstStyle/>
-          <a:p>
-            <a:fld id="{F7021451-1387-4CA6-816F-3879F97B5CBC}" type="slidenum">
-              <a:rPr lang="en-US"/>
-              <a:t>8</a:t>
-            </a:fld>
-            <a:endParaRPr lang="en-US"/>
-          </a:p>
-        </p:txBody>
-      </p:sp>
-    </p:spTree>
-    <p:extLst>
-      <p:ext uri="{BB962C8B-B14F-4D97-AF65-F5344CB8AC3E}">
-        <p14:creationId xmlns:p14="http://schemas.microsoft.com/office/powerpoint/2010/main" val="1024086991"/>
-      </p:ext>
-    </p:extLst>
-  </p:cSld>
-  <p:clrMapOvr>
-    <a:masterClrMapping/>
-  </p:clrMapOvr>
-</p:notes>
-</file>
-
 <file path=ppt/notesSlides/notesSlide9.xml><?xml version="1.0" encoding="utf-8"?>
 <p:notes xmlns:a="http://schemas.openxmlformats.org/drawingml/2006/main" xmlns:r="http://schemas.openxmlformats.org/officeDocument/2006/relationships" xmlns:p="http://schemas.openxmlformats.org/presentationml/2006/main">
   <p:cSld>
@@ -2889,10 +2203,6 @@
           <a:bodyPr/>
           <a:lstStyle/>
           <a:p>
-            <a:r>
-              <a:rPr lang="en-US" dirty="0"/>
-              <a:t/>
-            </a:r>
             <a:endParaRPr lang="en-US" dirty="0"/>
           </a:p>
         </p:txBody>
@@ -2966,6 +2276,11 @@
 <file path=ppt/slideMasters/slideMaster1.xml><?xml version="1.0" encoding="utf-8"?>
 <p:sldMaster xmlns:a="http://schemas.openxmlformats.org/drawingml/2006/main" xmlns:r="http://schemas.openxmlformats.org/officeDocument/2006/relationships" xmlns:p="http://schemas.openxmlformats.org/presentationml/2006/main">
   <p:cSld>
+    <p:bg>
+      <p:bgRef idx="1001">
+        <a:schemeClr val="bg1"/>
+      </p:bgRef>
+    </p:bg>
     <p:spTree>
       <p:nvGrpSpPr>
         <p:cNvPr id="1" name=""/>
@@ -3246,7 +2561,7 @@
     <p:bg>
       <p:bgPr>
         <a:blipFill dpi="0" rotWithShape="1">
-          <a:blip r:embed="rId1">
+          <a:blip r:embed="rId3">
             <a:lum/>
           </a:blip>
           <a:srcRect/>
@@ -3285,7 +2600,7 @@
     <p:bg>
       <p:bgPr>
         <a:blipFill dpi="0" rotWithShape="1">
-          <a:blip r:embed="rId1">
+          <a:blip r:embed="rId3">
             <a:lum/>
           </a:blip>
           <a:srcRect/>
@@ -3324,7 +2639,7 @@
     <p:bg>
       <p:bgPr>
         <a:blipFill dpi="0" rotWithShape="1">
-          <a:blip r:embed="rId1">
+          <a:blip r:embed="rId3">
             <a:lum/>
           </a:blip>
           <a:srcRect/>
@@ -3363,7 +2678,7 @@
     <p:bg>
       <p:bgPr>
         <a:blipFill dpi="0" rotWithShape="1">
-          <a:blip r:embed="rId1">
+          <a:blip r:embed="rId3">
             <a:lum/>
           </a:blip>
           <a:srcRect/>
@@ -3402,7 +2717,7 @@
     <p:bg>
       <p:bgPr>
         <a:blipFill dpi="0" rotWithShape="1">
-          <a:blip r:embed="rId1">
+          <a:blip r:embed="rId3">
             <a:lum/>
           </a:blip>
           <a:srcRect/>
@@ -3441,7 +2756,7 @@
     <p:bg>
       <p:bgPr>
         <a:blipFill dpi="0" rotWithShape="1">
-          <a:blip r:embed="rId1">
+          <a:blip r:embed="rId3">
             <a:lum/>
           </a:blip>
           <a:srcRect/>
@@ -3480,7 +2795,7 @@
     <p:bg>
       <p:bgPr>
         <a:blipFill dpi="0" rotWithShape="1">
-          <a:blip r:embed="rId1">
+          <a:blip r:embed="rId3">
             <a:lum/>
           </a:blip>
           <a:srcRect/>
@@ -3519,7 +2834,7 @@
     <p:bg>
       <p:bgPr>
         <a:blipFill dpi="0" rotWithShape="1">
-          <a:blip r:embed="rId1">
+          <a:blip r:embed="rId3">
             <a:lum/>
           </a:blip>
           <a:srcRect/>
@@ -3558,7 +2873,7 @@
     <p:bg>
       <p:bgPr>
         <a:blipFill dpi="0" rotWithShape="1">
-          <a:blip r:embed="rId1">
+          <a:blip r:embed="rId3">
             <a:lum/>
           </a:blip>
           <a:srcRect/>
@@ -3597,7 +2912,7 @@
     <p:bg>
       <p:bgPr>
         <a:blipFill dpi="0" rotWithShape="1">
-          <a:blip r:embed="rId1">
+          <a:blip r:embed="rId3">
             <a:lum/>
           </a:blip>
           <a:srcRect/>
@@ -3636,7 +2951,7 @@
     <p:bg>
       <p:bgPr>
         <a:blipFill dpi="0" rotWithShape="1">
-          <a:blip r:embed="rId1">
+          <a:blip r:embed="rId3">
             <a:lum/>
           </a:blip>
           <a:srcRect/>
@@ -3675,7 +2990,7 @@
     <p:bg>
       <p:bgPr>
         <a:blipFill dpi="0" rotWithShape="1">
-          <a:blip r:embed="rId1">
+          <a:blip r:embed="rId3">
             <a:lum/>
           </a:blip>
           <a:srcRect/>
@@ -3714,7 +3029,7 @@
     <p:bg>
       <p:bgPr>
         <a:blipFill dpi="0" rotWithShape="1">
-          <a:blip r:embed="rId1">
+          <a:blip r:embed="rId3">
             <a:lum/>
           </a:blip>
           <a:srcRect/>
@@ -3753,7 +3068,7 @@
     <p:bg>
       <p:bgPr>
         <a:blipFill dpi="0" rotWithShape="1">
-          <a:blip r:embed="rId1">
+          <a:blip r:embed="rId3">
             <a:lum/>
           </a:blip>
           <a:srcRect/>
@@ -3792,7 +3107,7 @@
     <p:bg>
       <p:bgPr>
         <a:blipFill dpi="0" rotWithShape="1">
-          <a:blip r:embed="rId1">
+          <a:blip r:embed="rId3">
             <a:lum/>
           </a:blip>
           <a:srcRect/>
@@ -3825,13 +3140,13 @@
 </p:sld>
 </file>
 
-<file path=ppt/slides/slide23.xml><?xml version="1.0" encoding="utf-8"?>
+<file path=ppt/slides/slide3.xml><?xml version="1.0" encoding="utf-8"?>
 <p:sld xmlns:a="http://schemas.openxmlformats.org/drawingml/2006/main" xmlns:r="http://schemas.openxmlformats.org/officeDocument/2006/relationships" xmlns:p="http://schemas.openxmlformats.org/presentationml/2006/main">
-  <p:cSld name="Slide 23">
+  <p:cSld name="Slide 3">
     <p:bg>
       <p:bgPr>
         <a:blipFill dpi="0" rotWithShape="1">
-          <a:blip r:embed="rId1">
+          <a:blip r:embed="rId3">
             <a:lum/>
           </a:blip>
           <a:srcRect/>
@@ -3864,13 +3179,13 @@
 </p:sld>
 </file>
 
-<file path=ppt/slides/slide24.xml><?xml version="1.0" encoding="utf-8"?>
+<file path=ppt/slides/slide4.xml><?xml version="1.0" encoding="utf-8"?>
 <p:sld xmlns:a="http://schemas.openxmlformats.org/drawingml/2006/main" xmlns:r="http://schemas.openxmlformats.org/officeDocument/2006/relationships" xmlns:p="http://schemas.openxmlformats.org/presentationml/2006/main">
-  <p:cSld name="Slide 24">
+  <p:cSld name="Slide 4">
     <p:bg>
       <p:bgPr>
         <a:blipFill dpi="0" rotWithShape="1">
-          <a:blip r:embed="rId1">
+          <a:blip r:embed="rId3">
             <a:lum/>
           </a:blip>
           <a:srcRect/>
@@ -3903,13 +3218,13 @@
 </p:sld>
 </file>
 
-<file path=ppt/slides/slide25.xml><?xml version="1.0" encoding="utf-8"?>
+<file path=ppt/slides/slide5.xml><?xml version="1.0" encoding="utf-8"?>
 <p:sld xmlns:a="http://schemas.openxmlformats.org/drawingml/2006/main" xmlns:r="http://schemas.openxmlformats.org/officeDocument/2006/relationships" xmlns:p="http://schemas.openxmlformats.org/presentationml/2006/main">
-  <p:cSld name="Slide 25">
+  <p:cSld name="Slide 5">
     <p:bg>
       <p:bgPr>
         <a:blipFill dpi="0" rotWithShape="1">
-          <a:blip r:embed="rId1">
+          <a:blip r:embed="rId3">
             <a:lum/>
           </a:blip>
           <a:srcRect/>
@@ -3942,13 +3257,13 @@
 </p:sld>
 </file>
 
-<file path=ppt/slides/slide26.xml><?xml version="1.0" encoding="utf-8"?>
+<file path=ppt/slides/slide6.xml><?xml version="1.0" encoding="utf-8"?>
 <p:sld xmlns:a="http://schemas.openxmlformats.org/drawingml/2006/main" xmlns:r="http://schemas.openxmlformats.org/officeDocument/2006/relationships" xmlns:p="http://schemas.openxmlformats.org/presentationml/2006/main">
-  <p:cSld name="Slide 26">
+  <p:cSld name="Slide 6">
     <p:bg>
       <p:bgPr>
         <a:blipFill dpi="0" rotWithShape="1">
-          <a:blip r:embed="rId1">
+          <a:blip r:embed="rId3">
             <a:lum/>
           </a:blip>
           <a:srcRect/>
@@ -3981,13 +3296,13 @@
 </p:sld>
 </file>
 
-<file path=ppt/slides/slide27.xml><?xml version="1.0" encoding="utf-8"?>
+<file path=ppt/slides/slide7.xml><?xml version="1.0" encoding="utf-8"?>
 <p:sld xmlns:a="http://schemas.openxmlformats.org/drawingml/2006/main" xmlns:r="http://schemas.openxmlformats.org/officeDocument/2006/relationships" xmlns:p="http://schemas.openxmlformats.org/presentationml/2006/main">
-  <p:cSld name="Slide 27">
+  <p:cSld name="Slide 7">
     <p:bg>
       <p:bgPr>
         <a:blipFill dpi="0" rotWithShape="1">
-          <a:blip r:embed="rId1">
+          <a:blip r:embed="rId3">
             <a:lum/>
           </a:blip>
           <a:srcRect/>
@@ -4020,13 +3335,13 @@
 </p:sld>
 </file>
 
-<file path=ppt/slides/slide3.xml><?xml version="1.0" encoding="utf-8"?>
+<file path=ppt/slides/slide8.xml><?xml version="1.0" encoding="utf-8"?>
 <p:sld xmlns:a="http://schemas.openxmlformats.org/drawingml/2006/main" xmlns:r="http://schemas.openxmlformats.org/officeDocument/2006/relationships" xmlns:p="http://schemas.openxmlformats.org/presentationml/2006/main">
-  <p:cSld name="Slide 3">
+  <p:cSld name="Slide 8">
     <p:bg>
       <p:bgPr>
         <a:blipFill dpi="0" rotWithShape="1">
-          <a:blip r:embed="rId1">
+          <a:blip r:embed="rId3">
             <a:lum/>
           </a:blip>
           <a:srcRect/>
@@ -4059,208 +3374,13 @@
 </p:sld>
 </file>
 
-<file path=ppt/slides/slide4.xml><?xml version="1.0" encoding="utf-8"?>
-<p:sld xmlns:a="http://schemas.openxmlformats.org/drawingml/2006/main" xmlns:r="http://schemas.openxmlformats.org/officeDocument/2006/relationships" xmlns:p="http://schemas.openxmlformats.org/presentationml/2006/main">
-  <p:cSld name="Slide 4">
-    <p:bg>
-      <p:bgPr>
-        <a:blipFill dpi="0" rotWithShape="1">
-          <a:blip r:embed="rId1">
-            <a:lum/>
-          </a:blip>
-          <a:srcRect/>
-          <a:stretch>
-            <a:fillRect/>
-          </a:stretch>
-        </a:blipFill>
-        <a:effectLst/>
-      </p:bgPr>
-    </p:bg>
-    <p:spTree>
-      <p:nvGrpSpPr>
-        <p:cNvPr id="1" name=""/>
-        <p:cNvGrpSpPr/>
-        <p:nvPr/>
-      </p:nvGrpSpPr>
-      <p:grpSpPr>
-        <a:xfrm>
-          <a:off x="0" y="0"/>
-          <a:ext cx="0" cy="0"/>
-          <a:chOff x="0" y="0"/>
-          <a:chExt cx="0" cy="0"/>
-        </a:xfrm>
-      </p:grpSpPr>
-    </p:spTree>
-  </p:cSld>
-  <p:clrMapOvr>
-    <a:masterClrMapping/>
-  </p:clrMapOvr>
-</p:sld>
-</file>
-
-<file path=ppt/slides/slide5.xml><?xml version="1.0" encoding="utf-8"?>
-<p:sld xmlns:a="http://schemas.openxmlformats.org/drawingml/2006/main" xmlns:r="http://schemas.openxmlformats.org/officeDocument/2006/relationships" xmlns:p="http://schemas.openxmlformats.org/presentationml/2006/main">
-  <p:cSld name="Slide 5">
-    <p:bg>
-      <p:bgPr>
-        <a:blipFill dpi="0" rotWithShape="1">
-          <a:blip r:embed="rId1">
-            <a:lum/>
-          </a:blip>
-          <a:srcRect/>
-          <a:stretch>
-            <a:fillRect/>
-          </a:stretch>
-        </a:blipFill>
-        <a:effectLst/>
-      </p:bgPr>
-    </p:bg>
-    <p:spTree>
-      <p:nvGrpSpPr>
-        <p:cNvPr id="1" name=""/>
-        <p:cNvGrpSpPr/>
-        <p:nvPr/>
-      </p:nvGrpSpPr>
-      <p:grpSpPr>
-        <a:xfrm>
-          <a:off x="0" y="0"/>
-          <a:ext cx="0" cy="0"/>
-          <a:chOff x="0" y="0"/>
-          <a:chExt cx="0" cy="0"/>
-        </a:xfrm>
-      </p:grpSpPr>
-    </p:spTree>
-  </p:cSld>
-  <p:clrMapOvr>
-    <a:masterClrMapping/>
-  </p:clrMapOvr>
-</p:sld>
-</file>
-
-<file path=ppt/slides/slide6.xml><?xml version="1.0" encoding="utf-8"?>
-<p:sld xmlns:a="http://schemas.openxmlformats.org/drawingml/2006/main" xmlns:r="http://schemas.openxmlformats.org/officeDocument/2006/relationships" xmlns:p="http://schemas.openxmlformats.org/presentationml/2006/main">
-  <p:cSld name="Slide 6">
-    <p:bg>
-      <p:bgPr>
-        <a:blipFill dpi="0" rotWithShape="1">
-          <a:blip r:embed="rId1">
-            <a:lum/>
-          </a:blip>
-          <a:srcRect/>
-          <a:stretch>
-            <a:fillRect/>
-          </a:stretch>
-        </a:blipFill>
-        <a:effectLst/>
-      </p:bgPr>
-    </p:bg>
-    <p:spTree>
-      <p:nvGrpSpPr>
-        <p:cNvPr id="1" name=""/>
-        <p:cNvGrpSpPr/>
-        <p:nvPr/>
-      </p:nvGrpSpPr>
-      <p:grpSpPr>
-        <a:xfrm>
-          <a:off x="0" y="0"/>
-          <a:ext cx="0" cy="0"/>
-          <a:chOff x="0" y="0"/>
-          <a:chExt cx="0" cy="0"/>
-        </a:xfrm>
-      </p:grpSpPr>
-    </p:spTree>
-  </p:cSld>
-  <p:clrMapOvr>
-    <a:masterClrMapping/>
-  </p:clrMapOvr>
-</p:sld>
-</file>
-
-<file path=ppt/slides/slide7.xml><?xml version="1.0" encoding="utf-8"?>
-<p:sld xmlns:a="http://schemas.openxmlformats.org/drawingml/2006/main" xmlns:r="http://schemas.openxmlformats.org/officeDocument/2006/relationships" xmlns:p="http://schemas.openxmlformats.org/presentationml/2006/main">
-  <p:cSld name="Slide 7">
-    <p:bg>
-      <p:bgPr>
-        <a:blipFill dpi="0" rotWithShape="1">
-          <a:blip r:embed="rId1">
-            <a:lum/>
-          </a:blip>
-          <a:srcRect/>
-          <a:stretch>
-            <a:fillRect/>
-          </a:stretch>
-        </a:blipFill>
-        <a:effectLst/>
-      </p:bgPr>
-    </p:bg>
-    <p:spTree>
-      <p:nvGrpSpPr>
-        <p:cNvPr id="1" name=""/>
-        <p:cNvGrpSpPr/>
-        <p:nvPr/>
-      </p:nvGrpSpPr>
-      <p:grpSpPr>
-        <a:xfrm>
-          <a:off x="0" y="0"/>
-          <a:ext cx="0" cy="0"/>
-          <a:chOff x="0" y="0"/>
-          <a:chExt cx="0" cy="0"/>
-        </a:xfrm>
-      </p:grpSpPr>
-    </p:spTree>
-  </p:cSld>
-  <p:clrMapOvr>
-    <a:masterClrMapping/>
-  </p:clrMapOvr>
-</p:sld>
-</file>
-
-<file path=ppt/slides/slide8.xml><?xml version="1.0" encoding="utf-8"?>
-<p:sld xmlns:a="http://schemas.openxmlformats.org/drawingml/2006/main" xmlns:r="http://schemas.openxmlformats.org/officeDocument/2006/relationships" xmlns:p="http://schemas.openxmlformats.org/presentationml/2006/main">
-  <p:cSld name="Slide 8">
-    <p:bg>
-      <p:bgPr>
-        <a:blipFill dpi="0" rotWithShape="1">
-          <a:blip r:embed="rId1">
-            <a:lum/>
-          </a:blip>
-          <a:srcRect/>
-          <a:stretch>
-            <a:fillRect/>
-          </a:stretch>
-        </a:blipFill>
-        <a:effectLst/>
-      </p:bgPr>
-    </p:bg>
-    <p:spTree>
-      <p:nvGrpSpPr>
-        <p:cNvPr id="1" name=""/>
-        <p:cNvGrpSpPr/>
-        <p:nvPr/>
-      </p:nvGrpSpPr>
-      <p:grpSpPr>
-        <a:xfrm>
-          <a:off x="0" y="0"/>
-          <a:ext cx="0" cy="0"/>
-          <a:chOff x="0" y="0"/>
-          <a:chExt cx="0" cy="0"/>
-        </a:xfrm>
-      </p:grpSpPr>
-    </p:spTree>
-  </p:cSld>
-  <p:clrMapOvr>
-    <a:masterClrMapping/>
-  </p:clrMapOvr>
-</p:sld>
-</file>
-
 <file path=ppt/slides/slide9.xml><?xml version="1.0" encoding="utf-8"?>
 <p:sld xmlns:a="http://schemas.openxmlformats.org/drawingml/2006/main" xmlns:r="http://schemas.openxmlformats.org/officeDocument/2006/relationships" xmlns:p="http://schemas.openxmlformats.org/presentationml/2006/main">
   <p:cSld name="Slide 9">
     <p:bg>
       <p:bgPr>
         <a:blipFill dpi="0" rotWithShape="1">
-          <a:blip r:embed="rId1">
+          <a:blip r:embed="rId3">
             <a:lum/>
           </a:blip>
           <a:srcRect/>
@@ -4586,4 +3706,319 @@
     </a:ext>
   </a:extLst>
 </a:theme>
+</file>
+
+<file path=ppt/theme/theme2.xml><?xml version="1.0" encoding="utf-8"?>
+<a:theme xmlns:a="http://schemas.openxmlformats.org/drawingml/2006/main" name="Tema di Office">
+  <a:themeElements>
+    <a:clrScheme name="Office">
+      <a:dk1>
+        <a:sysClr val="windowText" lastClr="000000"/>
+      </a:dk1>
+      <a:lt1>
+        <a:sysClr val="window" lastClr="FFFFFF"/>
+      </a:lt1>
+      <a:dk2>
+        <a:srgbClr val="0E2841"/>
+      </a:dk2>
+      <a:lt2>
+        <a:srgbClr val="E8E8E8"/>
+      </a:lt2>
+      <a:accent1>
+        <a:srgbClr val="156082"/>
+      </a:accent1>
+      <a:accent2>
+        <a:srgbClr val="E97132"/>
+      </a:accent2>
+      <a:accent3>
+        <a:srgbClr val="196B24"/>
+      </a:accent3>
+      <a:accent4>
+        <a:srgbClr val="0F9ED5"/>
+      </a:accent4>
+      <a:accent5>
+        <a:srgbClr val="A02B93"/>
+      </a:accent5>
+      <a:accent6>
+        <a:srgbClr val="4EA72E"/>
+      </a:accent6>
+      <a:hlink>
+        <a:srgbClr val="467886"/>
+      </a:hlink>
+      <a:folHlink>
+        <a:srgbClr val="96607D"/>
+      </a:folHlink>
+    </a:clrScheme>
+    <a:fontScheme name="Office">
+      <a:majorFont>
+        <a:latin typeface="Aptos Display" panose="02110004020202020204"/>
+        <a:ea typeface=""/>
+        <a:cs typeface=""/>
+        <a:font script="Jpan" typeface="游ゴシック Light"/>
+        <a:font script="Hang" typeface="맑은 고딕"/>
+        <a:font script="Hans" typeface="等线 Light"/>
+        <a:font script="Hant" typeface="新細明體"/>
+        <a:font script="Arab" typeface="Times New Roman"/>
+        <a:font script="Hebr" typeface="Times New Roman"/>
+        <a:font script="Thai" typeface="Angsana New"/>
+        <a:font script="Ethi" typeface="Nyala"/>
+        <a:font script="Beng" typeface="Vrinda"/>
+        <a:font script="Gujr" typeface="Shruti"/>
+        <a:font script="Khmr" typeface="MoolBoran"/>
+        <a:font script="Knda" typeface="Tunga"/>
+        <a:font script="Guru" typeface="Raavi"/>
+        <a:font script="Cans" typeface="Euphemia"/>
+        <a:font script="Cher" typeface="Plantagenet Cherokee"/>
+        <a:font script="Yiii" typeface="Microsoft Yi Baiti"/>
+        <a:font script="Tibt" typeface="Microsoft Himalaya"/>
+        <a:font script="Thaa" typeface="MV Boli"/>
+        <a:font script="Deva" typeface="Mangal"/>
+        <a:font script="Telu" typeface="Gautami"/>
+        <a:font script="Taml" typeface="Latha"/>
+        <a:font script="Syrc" typeface="Estrangelo Edessa"/>
+        <a:font script="Orya" typeface="Kalinga"/>
+        <a:font script="Mlym" typeface="Kartika"/>
+        <a:font script="Laoo" typeface="DokChampa"/>
+        <a:font script="Sinh" typeface="Iskoola Pota"/>
+        <a:font script="Mong" typeface="Mongolian Baiti"/>
+        <a:font script="Viet" typeface="Times New Roman"/>
+        <a:font script="Uigh" typeface="Microsoft Uighur"/>
+        <a:font script="Geor" typeface="Sylfaen"/>
+        <a:font script="Armn" typeface="Arial"/>
+        <a:font script="Bugi" typeface="Leelawadee UI"/>
+        <a:font script="Bopo" typeface="Microsoft JhengHei"/>
+        <a:font script="Java" typeface="Javanese Text"/>
+        <a:font script="Lisu" typeface="Segoe UI"/>
+        <a:font script="Mymr" typeface="Myanmar Text"/>
+        <a:font script="Nkoo" typeface="Ebrima"/>
+        <a:font script="Olck" typeface="Nirmala UI"/>
+        <a:font script="Osma" typeface="Ebrima"/>
+        <a:font script="Phag" typeface="Phagspa"/>
+        <a:font script="Syrn" typeface="Estrangelo Edessa"/>
+        <a:font script="Syrj" typeface="Estrangelo Edessa"/>
+        <a:font script="Syre" typeface="Estrangelo Edessa"/>
+        <a:font script="Sora" typeface="Nirmala UI"/>
+        <a:font script="Tale" typeface="Microsoft Tai Le"/>
+        <a:font script="Talu" typeface="Microsoft New Tai Lue"/>
+        <a:font script="Tfng" typeface="Ebrima"/>
+      </a:majorFont>
+      <a:minorFont>
+        <a:latin typeface="Aptos" panose="02110004020202020204"/>
+        <a:ea typeface=""/>
+        <a:cs typeface=""/>
+        <a:font script="Jpan" typeface="游ゴシック"/>
+        <a:font script="Hang" typeface="맑은 고딕"/>
+        <a:font script="Hans" typeface="等线"/>
+        <a:font script="Hant" typeface="新細明體"/>
+        <a:font script="Arab" typeface="Arial"/>
+        <a:font script="Hebr" typeface="Arial"/>
+        <a:font script="Thai" typeface="Cordia New"/>
+        <a:font script="Ethi" typeface="Nyala"/>
+        <a:font script="Beng" typeface="Vrinda"/>
+        <a:font script="Gujr" typeface="Shruti"/>
+        <a:font script="Khmr" typeface="DaunPenh"/>
+        <a:font script="Knda" typeface="Tunga"/>
+        <a:font script="Guru" typeface="Raavi"/>
+        <a:font script="Cans" typeface="Euphemia"/>
+        <a:font script="Cher" typeface="Plantagenet Cherokee"/>
+        <a:font script="Yiii" typeface="Microsoft Yi Baiti"/>
+        <a:font script="Tibt" typeface="Microsoft Himalaya"/>
+        <a:font script="Thaa" typeface="MV Boli"/>
+        <a:font script="Deva" typeface="Mangal"/>
+        <a:font script="Telu" typeface="Gautami"/>
+        <a:font script="Taml" typeface="Latha"/>
+        <a:font script="Syrc" typeface="Estrangelo Edessa"/>
+        <a:font script="Orya" typeface="Kalinga"/>
+        <a:font script="Mlym" typeface="Kartika"/>
+        <a:font script="Laoo" typeface="DokChampa"/>
+        <a:font script="Sinh" typeface="Iskoola Pota"/>
+        <a:font script="Mong" typeface="Mongolian Baiti"/>
+        <a:font script="Viet" typeface="Arial"/>
+        <a:font script="Uigh" typeface="Microsoft Uighur"/>
+        <a:font script="Geor" typeface="Sylfaen"/>
+        <a:font script="Armn" typeface="Arial"/>
+        <a:font script="Bugi" typeface="Leelawadee UI"/>
+        <a:font script="Bopo" typeface="Microsoft JhengHei"/>
+        <a:font script="Java" typeface="Javanese Text"/>
+        <a:font script="Lisu" typeface="Segoe UI"/>
+        <a:font script="Mymr" typeface="Myanmar Text"/>
+        <a:font script="Nkoo" typeface="Ebrima"/>
+        <a:font script="Olck" typeface="Nirmala UI"/>
+        <a:font script="Osma" typeface="Ebrima"/>
+        <a:font script="Phag" typeface="Phagspa"/>
+        <a:font script="Syrn" typeface="Estrangelo Edessa"/>
+        <a:font script="Syrj" typeface="Estrangelo Edessa"/>
+        <a:font script="Syre" typeface="Estrangelo Edessa"/>
+        <a:font script="Sora" typeface="Nirmala UI"/>
+        <a:font script="Tale" typeface="Microsoft Tai Le"/>
+        <a:font script="Talu" typeface="Microsoft New Tai Lue"/>
+        <a:font script="Tfng" typeface="Ebrima"/>
+      </a:minorFont>
+    </a:fontScheme>
+    <a:fmtScheme name="Office">
+      <a:fillStyleLst>
+        <a:solidFill>
+          <a:schemeClr val="phClr"/>
+        </a:solidFill>
+        <a:gradFill rotWithShape="1">
+          <a:gsLst>
+            <a:gs pos="0">
+              <a:schemeClr val="phClr">
+                <a:lumMod val="110000"/>
+                <a:satMod val="105000"/>
+                <a:tint val="67000"/>
+              </a:schemeClr>
+            </a:gs>
+            <a:gs pos="50000">
+              <a:schemeClr val="phClr">
+                <a:lumMod val="105000"/>
+                <a:satMod val="103000"/>
+                <a:tint val="73000"/>
+              </a:schemeClr>
+            </a:gs>
+            <a:gs pos="100000">
+              <a:schemeClr val="phClr">
+                <a:lumMod val="105000"/>
+                <a:satMod val="109000"/>
+                <a:tint val="81000"/>
+              </a:schemeClr>
+            </a:gs>
+          </a:gsLst>
+          <a:lin ang="5400000" scaled="0"/>
+        </a:gradFill>
+        <a:gradFill rotWithShape="1">
+          <a:gsLst>
+            <a:gs pos="0">
+              <a:schemeClr val="phClr">
+                <a:satMod val="103000"/>
+                <a:lumMod val="102000"/>
+                <a:tint val="94000"/>
+              </a:schemeClr>
+            </a:gs>
+            <a:gs pos="50000">
+              <a:schemeClr val="phClr">
+                <a:satMod val="110000"/>
+                <a:lumMod val="100000"/>
+                <a:shade val="100000"/>
+              </a:schemeClr>
+            </a:gs>
+            <a:gs pos="100000">
+              <a:schemeClr val="phClr">
+                <a:lumMod val="99000"/>
+                <a:satMod val="120000"/>
+                <a:shade val="78000"/>
+              </a:schemeClr>
+            </a:gs>
+          </a:gsLst>
+          <a:lin ang="5400000" scaled="0"/>
+        </a:gradFill>
+      </a:fillStyleLst>
+      <a:lnStyleLst>
+        <a:ln w="12700" cap="flat" cmpd="sng" algn="ctr">
+          <a:solidFill>
+            <a:schemeClr val="phClr"/>
+          </a:solidFill>
+          <a:prstDash val="solid"/>
+          <a:miter lim="800000"/>
+        </a:ln>
+        <a:ln w="19050" cap="flat" cmpd="sng" algn="ctr">
+          <a:solidFill>
+            <a:schemeClr val="phClr"/>
+          </a:solidFill>
+          <a:prstDash val="solid"/>
+          <a:miter lim="800000"/>
+        </a:ln>
+        <a:ln w="25400" cap="flat" cmpd="sng" algn="ctr">
+          <a:solidFill>
+            <a:schemeClr val="phClr"/>
+          </a:solidFill>
+          <a:prstDash val="solid"/>
+          <a:miter lim="800000"/>
+        </a:ln>
+      </a:lnStyleLst>
+      <a:effectStyleLst>
+        <a:effectStyle>
+          <a:effectLst/>
+        </a:effectStyle>
+        <a:effectStyle>
+          <a:effectLst/>
+        </a:effectStyle>
+        <a:effectStyle>
+          <a:effectLst>
+            <a:outerShdw blurRad="57150" dist="19050" dir="5400000" algn="ctr" rotWithShape="0">
+              <a:srgbClr val="000000">
+                <a:alpha val="63000"/>
+              </a:srgbClr>
+            </a:outerShdw>
+          </a:effectLst>
+        </a:effectStyle>
+      </a:effectStyleLst>
+      <a:bgFillStyleLst>
+        <a:solidFill>
+          <a:schemeClr val="phClr"/>
+        </a:solidFill>
+        <a:solidFill>
+          <a:schemeClr val="phClr">
+            <a:tint val="95000"/>
+            <a:satMod val="170000"/>
+          </a:schemeClr>
+        </a:solidFill>
+        <a:gradFill rotWithShape="1">
+          <a:gsLst>
+            <a:gs pos="0">
+              <a:schemeClr val="phClr">
+                <a:tint val="93000"/>
+                <a:satMod val="150000"/>
+                <a:shade val="98000"/>
+                <a:lumMod val="102000"/>
+              </a:schemeClr>
+            </a:gs>
+            <a:gs pos="50000">
+              <a:schemeClr val="phClr">
+                <a:tint val="98000"/>
+                <a:satMod val="130000"/>
+                <a:shade val="90000"/>
+                <a:lumMod val="103000"/>
+              </a:schemeClr>
+            </a:gs>
+            <a:gs pos="100000">
+              <a:schemeClr val="phClr">
+                <a:shade val="63000"/>
+                <a:satMod val="120000"/>
+              </a:schemeClr>
+            </a:gs>
+          </a:gsLst>
+          <a:lin ang="5400000" scaled="0"/>
+        </a:gradFill>
+      </a:bgFillStyleLst>
+    </a:fmtScheme>
+  </a:themeElements>
+  <a:objectDefaults>
+    <a:lnDef>
+      <a:spPr/>
+      <a:bodyPr/>
+      <a:lstStyle/>
+      <a:style>
+        <a:lnRef idx="2">
+          <a:schemeClr val="accent1"/>
+        </a:lnRef>
+        <a:fillRef idx="0">
+          <a:schemeClr val="accent1"/>
+        </a:fillRef>
+        <a:effectRef idx="1">
+          <a:schemeClr val="accent1"/>
+        </a:effectRef>
+        <a:fontRef idx="minor">
+          <a:schemeClr val="tx1"/>
+        </a:fontRef>
+      </a:style>
+    </a:lnDef>
+  </a:objectDefaults>
+  <a:extraClrSchemeLst/>
+  <a:extLst>
+    <a:ext uri="{05A4C25C-085E-4340-85A3-A5531E510DB2}">
+      <thm15:themeFamily xmlns:thm15="http://schemas.microsoft.com/office/thememl/2012/main" name="Office Theme" id="{2E142A2C-CD16-42D6-873A-C26D2A0506FA}" vid="{1BDDFF52-6CD6-40A5-AB3C-68EB2F1E4D0A}"/>
+    </a:ext>
+  </a:extLst>
+</a:theme>
 </file>